--- a/slides/02a_intro-to-mmm_WT26-27.pptx
+++ b/slides/02a_intro-to-mmm_WT26-27.pptx
@@ -55,6 +55,7 @@
     <p:sldId id="297" r:id="rId54"/>
     <p:sldId id="298" r:id="rId55"/>
     <p:sldId id="299" r:id="rId56"/>
+    <p:sldId id="300" r:id="rId57"/>
   </p:sldIdLst>
   <p:sldSz cx="9144000" cy="5715000" type="screen16x10"/>
   <p:notesSz cx="6858000" cy="9144000"/>
@@ -1336,7 +1337,7 @@
           <a:lstStyle/>
           <a:p>
             <a:r>
-              <a:t>Each channel's weekly spend is first transformed (carryover, then diminishing returns) and multiplied by a coefficient; the controls form the base. In the additive form a coefficient is extra units per unit of transformed spend. In the log-log form coefficients are elasticities: the per cent change in sales for a 1 % change in the driver. Log-log is the classic constant-elasticity model of Hanssens et al.; Tellis (2006) gives a compact primer. In Session 2 you estimate both with statsmodels.</a:t>
+              <a:t>Each channel's weekly spend is first transformed (carryover, then diminishing returns) and multiplied by a coefficient; the controls form the base. In the additive form a coefficient is extra units per unit of transformed spend. In the log-log form coefficients are elasticities: the per cent change in sales for a 1 % change in the driver. Log-log is the classic constant-elasticity model of Hanssens et al.; Tellis (2006) gives a compact primer. In Session 2 you estimate both with statsmodels. Refresher: deck 01b (statistics and regression), Part 6 for log-log models and elasticities (chocolate brand 1: -3.64), Part 9 for the statsmodels code.</a:t>
             </a:r>
           </a:p>
         </p:txBody>
@@ -2246,7 +2247,7 @@
           <a:lstStyle/>
           <a:p>
             <a:r>
-              <a:t>Chan and Perry (2017) list why MMM is hard. Endogeneity: budgets follow demand, so spend and sales rise together even without any effect; TV budgets peak before Christmas, when people buy anyway. Multicollinearity: channels launched together cannot be separated; check variance inflation factors (VIF). Overfitting: five channels with a decay, a shape and an effect each are many parameters for 156 weeks. Identification: saturation and effects that change over time can mimic each other (Dew, Padilla and Shchetkina 2024). Heusch (2026, Zalando) shows a standard MMM reporting a paid-search ROAS of 10.6 where geo experiments found 4.2.</a:t>
+              <a:t>Chan and Perry (2017) list why MMM is hard. Endogeneity: budgets follow demand, so spend and sales rise together even without any effect; TV budgets peak before Christmas, when people buy anyway. Multicollinearity: channels launched together cannot be separated; check variance inflation factors (VIF). Overfitting: five channels with a decay, a shape and an effect each are many parameters for 156 weeks. Identification: saturation and effects that change over time can mimic each other (Dew, Padilla and Shchetkina 2024). Heusch (2026, Zalando) shows a standard MMM reporting a paid-search ROAS of 10.6 where geo experiments found 4.2. Refresher on VIF, residual checks and endogeneity: deck 01b, Part 7 (assumptions and tests).</a:t>
             </a:r>
           </a:p>
         </p:txBody>
@@ -3296,7 +3297,7 @@
           <a:lstStyle/>
           <a:p>
             <a:r>
-              <a:t>The case study applies Sessions 1 to 4 to new data: Alpenglow's own web shop in Austria, Germany and Switzerland, plus its subscription club. Each block of the course answers one of the Head of E-commerce's questions. Details, data and assessment criteria are in the brief in assignments/group-project/ and on Canvas.</a:t>
+              <a:t>How this deck connects to the other course materials. The regression deck (01b) has everything the MMM builds on: log-log models and elasticities, dummies, the assumptions and tests (VIF, residual plots, endogeneity) and the statsmodels code. The short AI deck (01d) shows how to connect GitHub Copilot, the course default, and optionally Claude Code or Codex. Coding exercise 1 practises descriptive statistics, correlation and linear and log-log regression; every student gets a personal brief and data set on Canvas. All decks and class files are in the course repository (international-marketing-analytics-teaching).</a:t>
             </a:r>
           </a:p>
         </p:txBody>
@@ -3366,7 +3367,7 @@
           <a:lstStyle/>
           <a:p>
             <a:r>
-              <a:t>If students remember one thing: decisions are made at the margin, and an MMM is only as good as the variation in its data and the experiments that check it.</a:t>
+              <a:t>The case study applies Sessions 1 to 4 to new data: Alpenglow's own web shop in Austria, Germany and Switzerland, plus its subscription club. Each block of the course answers one of the Head of E-commerce's questions. Details, data and assessment criteria are in the brief in assignments/group-project/ and on Canvas.</a:t>
             </a:r>
           </a:p>
         </p:txBody>
@@ -3436,7 +3437,7 @@
           <a:lstStyle/>
           <a:p>
             <a:r>
-              <a:t>Start with Chan and Perry (short, free) and Jin et al. (free) for the modern model, Sethuraman et al. for benchmarks, and Gordon et al. for why experiments matter. Hanssens et al. is the reference book (WU library). The full annotated list is in instructor/resources/mmm-resource-guide.md.</a:t>
+              <a:t>If students remember one thing: decisions are made at the margin, and an MMM is only as good as the variation in its data and the experiments that check it.</a:t>
             </a:r>
           </a:p>
         </p:txBody>
@@ -3462,6 +3463,76 @@
 </file>
 
 <file path=ppt/notesSlides/notesSlide44.xml><?xml version="1.0" encoding="utf-8"?>
+<p:notes xmlns:a="http://schemas.openxmlformats.org/drawingml/2006/main" xmlns:p="http://schemas.openxmlformats.org/presentationml/2006/main" xmlns:r="http://schemas.openxmlformats.org/officeDocument/2006/relationships">
+  <p:cSld>
+    <p:spTree>
+      <p:nvGrpSpPr>
+        <p:cNvPr id="1" name=""/>
+        <p:cNvGrpSpPr/>
+        <p:nvPr/>
+      </p:nvGrpSpPr>
+      <p:grpSpPr>
+        <a:xfrm>
+          <a:off x="0" y="0"/>
+          <a:ext cx="0" cy="0"/>
+          <a:chOff x="0" y="0"/>
+          <a:chExt cx="0" cy="0"/>
+        </a:xfrm>
+      </p:grpSpPr>
+      <p:sp>
+        <p:nvSpPr>
+          <p:cNvPr id="2" name="Slide Image Placeholder 1"/>
+          <p:cNvSpPr>
+            <a:spLocks noGrp="1"/>
+          </p:cNvSpPr>
+          <p:nvPr>
+            <p:ph type="sldImg" idx="2"/>
+          </p:nvPr>
+        </p:nvSpPr>
+        <p:spPr/>
+      </p:sp>
+      <p:sp>
+        <p:nvSpPr>
+          <p:cNvPr id="3" name="Notes Placeholder 2"/>
+          <p:cNvSpPr>
+            <a:spLocks noGrp="1"/>
+          </p:cNvSpPr>
+          <p:nvPr>
+            <p:ph type="body" idx="3" sz="quarter"/>
+          </p:nvPr>
+        </p:nvSpPr>
+        <p:spPr/>
+        <p:txBody>
+          <a:bodyPr/>
+          <a:lstStyle/>
+          <a:p>
+            <a:r>
+              <a:t>Start with Chan and Perry (short, free) and Jin et al. (free) for the modern model, Sethuraman et al. for benchmarks, and Gordon et al. for why experiments matter. Hanssens et al. is the reference book (WU library). The full annotated list is in instructor/resources/mmm-resource-guide.md.</a:t>
+            </a:r>
+          </a:p>
+        </p:txBody>
+      </p:sp>
+      <p:sp>
+        <p:nvSpPr>
+          <p:cNvPr id="4" name="Slide Number Placeholder 3"/>
+          <p:cNvSpPr>
+            <a:spLocks noGrp="1"/>
+          </p:cNvSpPr>
+          <p:nvPr>
+            <p:ph type="sldNum" idx="5" sz="quarter"/>
+          </p:nvPr>
+        </p:nvSpPr>
+        <p:spPr/>
+      </p:sp>
+    </p:spTree>
+  </p:cSld>
+  <p:clrMapOvr>
+    <a:masterClrMapping/>
+  </p:clrMapOvr>
+</p:notes>
+</file>
+
+<file path=ppt/notesSlides/notesSlide45.xml><?xml version="1.0" encoding="utf-8"?>
 <p:notes xmlns:a="http://schemas.openxmlformats.org/drawingml/2006/main" xmlns:p="http://schemas.openxmlformats.org/presentationml/2006/main" xmlns:r="http://schemas.openxmlformats.org/officeDocument/2006/relationships">
   <p:cSld>
     <p:spTree>
@@ -20573,7 +20644,7 @@
                   <a:srgbClr val="595959"/>
                 </a:solidFill>
               </a:rPr>
-              <a:t>Sources: Hanssens et al. 2001; Tellis 2006; Jin et al. 2017</a:t>
+              <a:t>Sources: Hanssens et al. 2001; Tellis 2006; Jin et al. 2017  ·  Refresher: deck 01b, Parts 6 and 9</a:t>
             </a:r>
           </a:p>
         </p:txBody>
@@ -30906,7 +30977,7 @@
                   <a:srgbClr val="595959"/>
                 </a:solidFill>
               </a:rPr>
-              <a:t>Sources: Chan &amp; Perry 2017; Dew et al. 2024; Heusch 2026</a:t>
+              <a:t>Sources: Chan &amp; Perry 2017; Dew et al. 2024; Heusch 2026  ·  VIF, tests, endogeneity: deck 01b, Part 7</a:t>
             </a:r>
           </a:p>
         </p:txBody>
@@ -33837,7 +33908,7 @@
                   <a:schemeClr val="tx1"/>
                 </a:solidFill>
               </a:rPr>
-              <a:t>PyMC-Marketing and Meridian in Python, Session 5.</a:t>
+              <a:t>PyMC-Marketing and Meridian in Python, Session 5; set up your AI assistant with deck 01d.</a:t>
             </a:r>
           </a:p>
         </p:txBody>
@@ -42875,6 +42946,202 @@
         <p:nvPr/>
       </p:nvGrpSpPr>
       <p:grpSpPr/>
+      <p:graphicFrame>
+        <p:nvGraphicFramePr>
+          <p:cNvPr id="2" name="Find table"/>
+          <p:cNvGraphicFramePr>
+            <a:graphicFrameLocks noGrp="1"/>
+          </p:cNvGraphicFramePr>
+          <p:nvPr>
+            <p:ph type="tbl" idx="1"/>
+          </p:nvPr>
+        </p:nvGraphicFramePr>
+        <p:xfrm>
+          <a:off x="457200" y="1234440"/>
+          <a:ext cx="8229600" cy="2225040"/>
+        </p:xfrm>
+        <a:graphic>
+          <a:graphicData uri="http://schemas.openxmlformats.org/drawingml/2006/table">
+            <a:tbl>
+              <a:tblPr firstRow="1" bandRow="1">
+                <a:tableStyleId>{5C22544A-7EE6-4342-B048-85BDC9FD1C3A}</a:tableStyleId>
+              </a:tblPr>
+              <a:tblGrid>
+                <a:gridCol w="3108960"/>
+                <a:gridCol w="5120640"/>
+              </a:tblGrid>
+              <a:tr h="370840">
+                <a:tc>
+                  <a:txBody>
+                    <a:bodyPr/>
+                    <a:lstStyle/>
+                    <a:p>
+                      <a:r>
+                        <a:rPr sz="1300" lang="en-GB"/>
+                        <a:t>In this deck</a:t>
+                      </a:r>
+                    </a:p>
+                  </a:txBody>
+                  <a:tcPr marT="45000" marB="45000"/>
+                </a:tc>
+                <a:tc>
+                  <a:txBody>
+                    <a:bodyPr/>
+                    <a:lstStyle/>
+                    <a:p>
+                      <a:r>
+                        <a:rPr sz="1300" lang="en-GB"/>
+                        <a:t>Where to look</a:t>
+                      </a:r>
+                    </a:p>
+                  </a:txBody>
+                  <a:tcPr marT="45000" marB="45000"/>
+                </a:tc>
+              </a:tr>
+              <a:tr h="370840">
+                <a:tc>
+                  <a:txBody>
+                    <a:bodyPr/>
+                    <a:lstStyle/>
+                    <a:p>
+                      <a:r>
+                        <a:rPr sz="1200" b="1" lang="en-GB"/>
+                        <a:t>Regression, log-log, elasticities</a:t>
+                      </a:r>
+                    </a:p>
+                  </a:txBody>
+                  <a:tcPr marT="45000" marB="45000"/>
+                </a:tc>
+                <a:tc>
+                  <a:txBody>
+                    <a:bodyPr/>
+                    <a:lstStyle/>
+                    <a:p>
+                      <a:r>
+                        <a:rPr sz="1200" lang="en-GB"/>
+                        <a:t>deck 01b, Parts 6 and 9; sessions/01-foundations/regression_chocolate.qmd</a:t>
+                      </a:r>
+                    </a:p>
+                  </a:txBody>
+                  <a:tcPr marT="45000" marB="45000"/>
+                </a:tc>
+              </a:tr>
+              <a:tr h="370840">
+                <a:tc>
+                  <a:txBody>
+                    <a:bodyPr/>
+                    <a:lstStyle/>
+                    <a:p>
+                      <a:r>
+                        <a:rPr sz="1200" b="1" lang="en-GB"/>
+                        <a:t>VIF, tests, endogeneity (pitfalls)</a:t>
+                      </a:r>
+                    </a:p>
+                  </a:txBody>
+                  <a:tcPr marT="45000" marB="45000"/>
+                </a:tc>
+                <a:tc>
+                  <a:txBody>
+                    <a:bodyPr/>
+                    <a:lstStyle/>
+                    <a:p>
+                      <a:r>
+                        <a:rPr sz="1200" lang="en-GB"/>
+                        <a:t>deck 01b, Part 7: assumptions and tests</a:t>
+                      </a:r>
+                    </a:p>
+                  </a:txBody>
+                  <a:tcPr marT="45000" marB="45000"/>
+                </a:tc>
+              </a:tr>
+              <a:tr h="370840">
+                <a:tc>
+                  <a:txBody>
+                    <a:bodyPr/>
+                    <a:lstStyle/>
+                    <a:p>
+                      <a:r>
+                        <a:rPr sz="1200" b="1" lang="en-GB"/>
+                        <a:t>Coding in Python with an AI assistant</a:t>
+                      </a:r>
+                    </a:p>
+                  </a:txBody>
+                  <a:tcPr marT="45000" marB="45000"/>
+                </a:tc>
+                <a:tc>
+                  <a:txBody>
+                    <a:bodyPr/>
+                    <a:lstStyle/>
+                    <a:p>
+                      <a:r>
+                        <a:rPr sz="1200" lang="en-GB"/>
+                        <a:t>deck 01d: GitHub Copilot, Claude Code, Codex in Positron</a:t>
+                      </a:r>
+                    </a:p>
+                  </a:txBody>
+                  <a:tcPr marT="45000" marB="45000"/>
+                </a:tc>
+              </a:tr>
+              <a:tr h="370840">
+                <a:tc>
+                  <a:txBody>
+                    <a:bodyPr/>
+                    <a:lstStyle/>
+                    <a:p>
+                      <a:r>
+                        <a:rPr sz="1200" b="1" lang="en-GB"/>
+                        <a:t>Practice: regression on real data</a:t>
+                      </a:r>
+                    </a:p>
+                  </a:txBody>
+                  <a:tcPr marT="45000" marB="45000"/>
+                </a:tc>
+                <a:tc>
+                  <a:txBody>
+                    <a:bodyPr/>
+                    <a:lstStyle/>
+                    <a:p>
+                      <a:r>
+                        <a:rPr sz="1200" lang="en-GB"/>
+                        <a:t>coding exercise 1: your personal brief and data on Canvas</a:t>
+                      </a:r>
+                    </a:p>
+                  </a:txBody>
+                  <a:tcPr marT="45000" marB="45000"/>
+                </a:tc>
+              </a:tr>
+              <a:tr h="370840">
+                <a:tc>
+                  <a:txBody>
+                    <a:bodyPr/>
+                    <a:lstStyle/>
+                    <a:p>
+                      <a:r>
+                        <a:rPr sz="1200" b="1" lang="en-GB"/>
+                        <a:t>The full MMM, step by step</a:t>
+                      </a:r>
+                    </a:p>
+                  </a:txBody>
+                  <a:tcPr marT="45000" marB="45000"/>
+                </a:tc>
+                <a:tc>
+                  <a:txBody>
+                    <a:bodyPr/>
+                    <a:lstStyle/>
+                    <a:p>
+                      <a:r>
+                        <a:rPr sz="1200" lang="en-GB"/>
+                        <a:t>Sessions 2 to 5 and the group case study</a:t>
+                      </a:r>
+                    </a:p>
+                  </a:txBody>
+                  <a:tcPr marT="45000" marB="45000"/>
+                </a:tc>
+              </a:tr>
+            </a:tbl>
+          </a:graphicData>
+        </a:graphic>
+      </p:graphicFrame>
       <p:sp>
         <p:nvSpPr>
           <p:cNvPr id="3" name="Title 2"/>
@@ -42892,7 +43159,7 @@
           <a:p>
             <a:r>
               <a:rPr sz="1600" lang="en-GB"/>
-              <a:t>The group case study</a:t>
+              <a:t>Where to find what</a:t>
             </a:r>
           </a:p>
         </p:txBody>
@@ -42948,22 +43215,20 @@
       </p:sp>
       <p:sp>
         <p:nvSpPr>
-          <p:cNvPr id="10" name="Case steps step 1"/>
+          <p:cNvPr id="10" name="Find repo box"/>
           <p:cNvSpPr/>
           <p:nvPr/>
         </p:nvSpPr>
         <p:spPr>
           <a:xfrm>
-            <a:off x="457200" y="1234440"/>
-            <a:ext cx="2139696" cy="603504"/>
-          </a:xfrm>
-          <a:prstGeom prst="homePlate">
-            <a:avLst>
-              <a:gd name="adj" fmla="val 28000"/>
-            </a:avLst>
+            <a:off x="457200" y="4160520"/>
+            <a:ext cx="8229600" cy="640080"/>
+          </a:xfrm>
+          <a:prstGeom prst="rect">
+            <a:avLst/>
           </a:prstGeom>
           <a:solidFill>
-            <a:schemeClr val="bg2"/>
+            <a:schemeClr val="tx2"/>
           </a:solidFill>
           <a:ln>
             <a:noFill/>
@@ -42985,345 +43250,14 @@
           </a:fontRef>
         </p:style>
         <p:txBody>
-          <a:bodyPr rtlCol="0" anchor="ctr" wrap="square" rIns="128016" tIns="18288" bIns="18288"/>
-          <a:lstStyle/>
-          <a:p>
-            <a:pPr algn="ctr"/>
-            <a:r>
-              <a:rPr sz="1200" b="1" lang="en-GB">
-                <a:solidFill>
-                  <a:schemeClr val="tx2"/>
-                </a:solidFill>
-              </a:rPr>
-              <a:t>S1: what drives</a:t>
-            </a:r>
-            <a:br/>
-            <a:r>
-              <a:rPr sz="1200" b="1" lang="en-GB">
-                <a:solidFill>
-                  <a:schemeClr val="tx2"/>
-                </a:solidFill>
-              </a:rPr>
-              <a:t>weekly orders?</a:t>
-            </a:r>
-          </a:p>
-        </p:txBody>
-      </p:sp>
-      <p:sp>
-        <p:nvSpPr>
-          <p:cNvPr id="11" name="Case steps step 2"/>
-          <p:cNvSpPr/>
-          <p:nvPr/>
-        </p:nvSpPr>
-        <p:spPr>
-          <a:xfrm>
-            <a:off x="2487168" y="1234440"/>
-            <a:ext cx="2139696" cy="603504"/>
-          </a:xfrm>
-          <a:prstGeom prst="chevron">
-            <a:avLst>
-              <a:gd name="adj" fmla="val 28000"/>
-            </a:avLst>
-          </a:prstGeom>
-          <a:solidFill>
-            <a:schemeClr val="bg2"/>
-          </a:solidFill>
-          <a:ln>
-            <a:noFill/>
-          </a:ln>
-          <a:effectLst/>
-        </p:spPr>
-        <p:style>
-          <a:lnRef idx="1">
-            <a:schemeClr val="accent1"/>
-          </a:lnRef>
-          <a:fillRef idx="3">
-            <a:schemeClr val="accent1"/>
-          </a:fillRef>
-          <a:effectRef idx="2">
-            <a:schemeClr val="accent1"/>
-          </a:effectRef>
-          <a:fontRef idx="minor">
-            <a:schemeClr val="lt1"/>
-          </a:fontRef>
-        </p:style>
-        <p:txBody>
-          <a:bodyPr rtlCol="0" anchor="ctr" wrap="square" lIns="237744" rIns="128016" tIns="18288" bIns="18288"/>
-          <a:lstStyle/>
-          <a:p>
-            <a:pPr algn="ctr"/>
-            <a:r>
-              <a:rPr sz="1200" b="1" lang="en-GB">
-                <a:solidFill>
-                  <a:schemeClr val="tx2"/>
-                </a:solidFill>
-              </a:rPr>
-              <a:t>S2: price and</a:t>
-            </a:r>
-            <a:br/>
-            <a:r>
-              <a:rPr sz="1200" b="1" lang="en-GB">
-                <a:solidFill>
-                  <a:schemeClr val="tx2"/>
-                </a:solidFill>
-              </a:rPr>
-              <a:t>advertising</a:t>
-            </a:r>
-          </a:p>
-        </p:txBody>
-      </p:sp>
-      <p:sp>
-        <p:nvSpPr>
-          <p:cNvPr id="12" name="Case steps step 3"/>
-          <p:cNvSpPr/>
-          <p:nvPr/>
-        </p:nvSpPr>
-        <p:spPr>
-          <a:xfrm>
-            <a:off x="4517136" y="1234440"/>
-            <a:ext cx="2139696" cy="603504"/>
-          </a:xfrm>
-          <a:prstGeom prst="chevron">
-            <a:avLst>
-              <a:gd name="adj" fmla="val 28000"/>
-            </a:avLst>
-          </a:prstGeom>
-          <a:solidFill>
-            <a:schemeClr val="bg2"/>
-          </a:solidFill>
-          <a:ln>
-            <a:noFill/>
-          </a:ln>
-          <a:effectLst/>
-        </p:spPr>
-        <p:style>
-          <a:lnRef idx="1">
-            <a:schemeClr val="accent1"/>
-          </a:lnRef>
-          <a:fillRef idx="3">
-            <a:schemeClr val="accent1"/>
-          </a:fillRef>
-          <a:effectRef idx="2">
-            <a:schemeClr val="accent1"/>
-          </a:effectRef>
-          <a:fontRef idx="minor">
-            <a:schemeClr val="lt1"/>
-          </a:fontRef>
-        </p:style>
-        <p:txBody>
-          <a:bodyPr rtlCol="0" anchor="ctr" wrap="square" lIns="237744" rIns="128016" tIns="18288" bIns="18288"/>
-          <a:lstStyle/>
-          <a:p>
-            <a:pPr algn="ctr"/>
-            <a:r>
-              <a:rPr sz="1200" b="1" lang="en-GB">
-                <a:solidFill>
-                  <a:schemeClr val="tx2"/>
-                </a:solidFill>
-              </a:rPr>
-              <a:t>S3: who will</a:t>
-            </a:r>
-            <a:br/>
-            <a:r>
-              <a:rPr sz="1200" b="1" lang="en-GB">
-                <a:solidFill>
-                  <a:schemeClr val="tx2"/>
-                </a:solidFill>
-              </a:rPr>
-              <a:t>cancel?</a:t>
-            </a:r>
-          </a:p>
-        </p:txBody>
-      </p:sp>
-      <p:sp>
-        <p:nvSpPr>
-          <p:cNvPr id="13" name="Case steps step 4"/>
-          <p:cNvSpPr/>
-          <p:nvPr/>
-        </p:nvSpPr>
-        <p:spPr>
-          <a:xfrm>
-            <a:off x="6547104" y="1234440"/>
-            <a:ext cx="2139696" cy="603504"/>
-          </a:xfrm>
-          <a:prstGeom prst="chevron">
-            <a:avLst>
-              <a:gd name="adj" fmla="val 28000"/>
-            </a:avLst>
-          </a:prstGeom>
-          <a:solidFill>
-            <a:schemeClr val="bg2"/>
-          </a:solidFill>
-          <a:ln>
-            <a:noFill/>
-          </a:ln>
-          <a:effectLst/>
-        </p:spPr>
-        <p:style>
-          <a:lnRef idx="1">
-            <a:schemeClr val="accent1"/>
-          </a:lnRef>
-          <a:fillRef idx="3">
-            <a:schemeClr val="accent1"/>
-          </a:fillRef>
-          <a:effectRef idx="2">
-            <a:schemeClr val="accent1"/>
-          </a:effectRef>
-          <a:fontRef idx="minor">
-            <a:schemeClr val="lt1"/>
-          </a:fontRef>
-        </p:style>
-        <p:txBody>
-          <a:bodyPr rtlCol="0" anchor="ctr" wrap="square" lIns="237744" rIns="128016" tIns="18288" bIns="18288"/>
-          <a:lstStyle/>
-          <a:p>
-            <a:pPr algn="ctr"/>
-            <a:r>
-              <a:rPr sz="1200" b="1" lang="en-GB">
-                <a:solidFill>
-                  <a:schemeClr val="tx2"/>
-                </a:solidFill>
-              </a:rPr>
-              <a:t>S4: Q1 2026</a:t>
-            </a:r>
-            <a:br/>
-            <a:r>
-              <a:rPr sz="1200" b="1" lang="en-GB">
-                <a:solidFill>
-                  <a:schemeClr val="tx2"/>
-                </a:solidFill>
-              </a:rPr>
-              <a:t>baseline</a:t>
-            </a:r>
-          </a:p>
-        </p:txBody>
-      </p:sp>
-      <p:sp>
-        <p:nvSpPr>
-          <p:cNvPr id="14" name="Case card 1 body"/>
-          <p:cNvSpPr/>
-          <p:nvPr/>
-        </p:nvSpPr>
-        <p:spPr>
-          <a:xfrm>
-            <a:off x="457200" y="2423160"/>
-            <a:ext cx="2651760" cy="1417320"/>
-          </a:xfrm>
-          <a:prstGeom prst="rect">
-            <a:avLst/>
-          </a:prstGeom>
-          <a:solidFill>
-            <a:schemeClr val="bg2"/>
-          </a:solidFill>
-          <a:ln>
-            <a:noFill/>
-          </a:ln>
-          <a:effectLst/>
-        </p:spPr>
-        <p:style>
-          <a:lnRef idx="1">
-            <a:schemeClr val="accent1"/>
-          </a:lnRef>
-          <a:fillRef idx="3">
-            <a:schemeClr val="accent1"/>
-          </a:fillRef>
-          <a:effectRef idx="2">
-            <a:schemeClr val="accent1"/>
-          </a:effectRef>
-          <a:fontRef idx="minor">
-            <a:schemeClr val="lt1"/>
-          </a:fontRef>
-        </p:style>
-        <p:txBody>
           <a:bodyPr rtlCol="0" anchor="ctr"/>
           <a:lstStyle/>
           <a:p/>
-        </p:txBody>
-      </p:sp>
-      <p:sp>
-        <p:nvSpPr>
-          <p:cNvPr id="15" name="Case card 1 header"/>
-          <p:cNvSpPr/>
-          <p:nvPr/>
-        </p:nvSpPr>
-        <p:spPr>
-          <a:xfrm>
-            <a:off x="457200" y="2011680"/>
-            <a:ext cx="2651760" cy="411480"/>
-          </a:xfrm>
-          <a:prstGeom prst="rect">
-            <a:avLst/>
-          </a:prstGeom>
-          <a:solidFill>
-            <a:schemeClr val="accent1"/>
-          </a:solidFill>
-          <a:ln>
-            <a:noFill/>
-          </a:ln>
-          <a:effectLst/>
-        </p:spPr>
-        <p:style>
-          <a:lnRef idx="1">
-            <a:schemeClr val="accent1"/>
-          </a:lnRef>
-          <a:fillRef idx="3">
-            <a:schemeClr val="accent1"/>
-          </a:fillRef>
-          <a:effectRef idx="2">
-            <a:schemeClr val="accent1"/>
-          </a:effectRef>
-          <a:fontRef idx="minor">
-            <a:schemeClr val="lt1"/>
-          </a:fontRef>
-        </p:style>
-        <p:txBody>
-          <a:bodyPr rtlCol="0" anchor="ctr"/>
-          <a:lstStyle/>
-          <a:p/>
-        </p:txBody>
-      </p:sp>
-      <p:sp>
-        <p:nvSpPr>
-          <p:cNvPr id="16" name="Case card 1 heading"/>
-          <p:cNvSpPr txBox="1"/>
-          <p:nvPr/>
-        </p:nvSpPr>
-        <p:spPr>
-          <a:xfrm>
-            <a:off x="594360" y="2011680"/>
-            <a:ext cx="1965960" cy="411480"/>
-          </a:xfrm>
-          <a:prstGeom prst="rect">
-            <a:avLst/>
-          </a:prstGeom>
-          <a:noFill/>
-        </p:spPr>
-        <p:txBody>
-          <a:bodyPr wrap="square" lIns="0" rIns="0" tIns="0" bIns="0" anchor="ctr">
-            <a:noAutofit/>
-          </a:bodyPr>
-          <a:lstStyle/>
-          <a:p>
-            <a:pPr algn="l">
-              <a:spcAft>
-                <a:spcPts val="400"/>
-              </a:spcAft>
-            </a:pPr>
-            <a:r>
-              <a:rPr sz="1500" b="1" lang="en-GB">
-                <a:solidFill>
-                  <a:schemeClr val="bg1"/>
-                </a:solidFill>
-                <a:latin typeface="+mj-lt"/>
-              </a:rPr>
-              <a:t>The brief</a:t>
-            </a:r>
-          </a:p>
         </p:txBody>
       </p:sp>
       <p:pic>
         <p:nvPicPr>
-          <p:cNvPr id="17" name="Icon Case card 1" descr=""/>
+          <p:cNvPr id="11" name="Icon Find repo" descr=""/>
           <p:cNvPicPr>
             <a:picLocks noChangeAspect="1"/>
           </p:cNvPicPr>
@@ -43337,8 +43271,8 @@
         </p:blipFill>
         <p:spPr>
           <a:xfrm>
-            <a:off x="2670048" y="2061972"/>
-            <a:ext cx="310896" cy="310896"/>
+            <a:off x="658368" y="4297680"/>
+            <a:ext cx="365760" cy="365760"/>
           </a:xfrm>
           <a:prstGeom prst="rect">
             <a:avLst/>
@@ -43347,161 +43281,14 @@
       </p:pic>
       <p:sp>
         <p:nvSpPr>
-          <p:cNvPr id="18" name="Case card 1 text"/>
+          <p:cNvPr id="12" name="Find repo text"/>
           <p:cNvSpPr txBox="1"/>
           <p:nvPr/>
         </p:nvSpPr>
         <p:spPr>
           <a:xfrm>
-            <a:off x="621792" y="2560320"/>
-            <a:ext cx="2350008" cy="1143000"/>
-          </a:xfrm>
-          <a:prstGeom prst="rect">
-            <a:avLst/>
-          </a:prstGeom>
-          <a:noFill/>
-        </p:spPr>
-        <p:txBody>
-          <a:bodyPr wrap="square" lIns="0" rIns="0" tIns="0" bIns="0" anchor="t">
-            <a:noAutofit/>
-          </a:bodyPr>
-          <a:lstStyle/>
-          <a:p>
-            <a:pPr algn="l" marL="182880" indent="-182880">
-              <a:spcAft>
-                <a:spcPts val="600"/>
-              </a:spcAft>
-              <a:buClr>
-                <a:schemeClr val="accent1"/>
-              </a:buClr>
-              <a:buFont typeface="Arial"/>
-              <a:buChar char="▪"/>
-            </a:pPr>
-            <a:r>
-              <a:rPr sz="1300" b="0" lang="en-GB">
-                <a:solidFill>
-                  <a:schemeClr val="tx1"/>
-                </a:solidFill>
-              </a:rPr>
-              <a:t>Alpenglow's web shop in AT, DE and CH</a:t>
-            </a:r>
-          </a:p>
-          <a:p>
-            <a:pPr algn="l" marL="182880" indent="-182880">
-              <a:spcAft>
-                <a:spcPts val="600"/>
-              </a:spcAft>
-              <a:buClr>
-                <a:schemeClr val="accent1"/>
-              </a:buClr>
-              <a:buFont typeface="Arial"/>
-              <a:buChar char="▪"/>
-            </a:pPr>
-            <a:r>
-              <a:rPr sz="1300" b="0" lang="en-GB">
-                <a:solidFill>
-                  <a:schemeClr val="tx1"/>
-                </a:solidFill>
-              </a:rPr>
-              <a:t>Four questions from the Head of E-commerce</a:t>
-            </a:r>
-          </a:p>
-        </p:txBody>
-      </p:sp>
-      <p:sp>
-        <p:nvSpPr>
-          <p:cNvPr id="19" name="Case card 2 body"/>
-          <p:cNvSpPr/>
-          <p:nvPr/>
-        </p:nvSpPr>
-        <p:spPr>
-          <a:xfrm>
-            <a:off x="3246120" y="2423160"/>
-            <a:ext cx="2651760" cy="1417320"/>
-          </a:xfrm>
-          <a:prstGeom prst="rect">
-            <a:avLst/>
-          </a:prstGeom>
-          <a:solidFill>
-            <a:schemeClr val="bg2"/>
-          </a:solidFill>
-          <a:ln>
-            <a:noFill/>
-          </a:ln>
-          <a:effectLst/>
-        </p:spPr>
-        <p:style>
-          <a:lnRef idx="1">
-            <a:schemeClr val="accent1"/>
-          </a:lnRef>
-          <a:fillRef idx="3">
-            <a:schemeClr val="accent1"/>
-          </a:fillRef>
-          <a:effectRef idx="2">
-            <a:schemeClr val="accent1"/>
-          </a:effectRef>
-          <a:fontRef idx="minor">
-            <a:schemeClr val="lt1"/>
-          </a:fontRef>
-        </p:style>
-        <p:txBody>
-          <a:bodyPr rtlCol="0" anchor="ctr"/>
-          <a:lstStyle/>
-          <a:p/>
-        </p:txBody>
-      </p:sp>
-      <p:sp>
-        <p:nvSpPr>
-          <p:cNvPr id="20" name="Case card 2 header"/>
-          <p:cNvSpPr/>
-          <p:nvPr/>
-        </p:nvSpPr>
-        <p:spPr>
-          <a:xfrm>
-            <a:off x="3246120" y="2011680"/>
-            <a:ext cx="2651760" cy="411480"/>
-          </a:xfrm>
-          <a:prstGeom prst="rect">
-            <a:avLst/>
-          </a:prstGeom>
-          <a:solidFill>
-            <a:schemeClr val="accent1"/>
-          </a:solidFill>
-          <a:ln>
-            <a:noFill/>
-          </a:ln>
-          <a:effectLst/>
-        </p:spPr>
-        <p:style>
-          <a:lnRef idx="1">
-            <a:schemeClr val="accent1"/>
-          </a:lnRef>
-          <a:fillRef idx="3">
-            <a:schemeClr val="accent1"/>
-          </a:fillRef>
-          <a:effectRef idx="2">
-            <a:schemeClr val="accent1"/>
-          </a:effectRef>
-          <a:fontRef idx="minor">
-            <a:schemeClr val="lt1"/>
-          </a:fontRef>
-        </p:style>
-        <p:txBody>
-          <a:bodyPr rtlCol="0" anchor="ctr"/>
-          <a:lstStyle/>
-          <a:p/>
-        </p:txBody>
-      </p:sp>
-      <p:sp>
-        <p:nvSpPr>
-          <p:cNvPr id="21" name="Case card 2 heading"/>
-          <p:cNvSpPr txBox="1"/>
-          <p:nvPr/>
-        </p:nvSpPr>
-        <p:spPr>
-          <a:xfrm>
-            <a:off x="3383280" y="2011680"/>
-            <a:ext cx="1965960" cy="411480"/>
+            <a:off x="1207008" y="4160520"/>
+            <a:ext cx="7315200" cy="640080"/>
           </a:xfrm>
           <a:prstGeom prst="rect">
             <a:avLst/>
@@ -43520,509 +43307,20 @@
               </a:spcAft>
             </a:pPr>
             <a:r>
-              <a:rPr sz="1500" b="1" lang="en-GB">
+              <a:rPr sz="1200" b="1" lang="en-GB">
                 <a:solidFill>
                   <a:schemeClr val="bg1"/>
                 </a:solidFill>
-                <a:latin typeface="+mj-lt"/>
-              </a:rPr>
-              <a:t>The data</a:t>
-            </a:r>
-          </a:p>
-        </p:txBody>
-      </p:sp>
-      <p:pic>
-        <p:nvPicPr>
-          <p:cNvPr id="22" name="Icon Case card 2" descr=""/>
-          <p:cNvPicPr>
-            <a:picLocks noChangeAspect="1"/>
-          </p:cNvPicPr>
-          <p:nvPr/>
-        </p:nvPicPr>
-        <p:blipFill>
-          <a:blip r:embed="rId4"/>
-          <a:stretch>
-            <a:fillRect/>
-          </a:stretch>
-        </p:blipFill>
-        <p:spPr>
-          <a:xfrm>
-            <a:off x="5458968" y="2061972"/>
-            <a:ext cx="310896" cy="310896"/>
-          </a:xfrm>
-          <a:prstGeom prst="rect">
-            <a:avLst/>
-          </a:prstGeom>
-        </p:spPr>
-      </p:pic>
-      <p:sp>
-        <p:nvSpPr>
-          <p:cNvPr id="23" name="Case card 2 text"/>
-          <p:cNvSpPr txBox="1"/>
-          <p:nvPr/>
-        </p:nvSpPr>
-        <p:spPr>
-          <a:xfrm>
-            <a:off x="3410712" y="2560320"/>
-            <a:ext cx="2350008" cy="1143000"/>
-          </a:xfrm>
-          <a:prstGeom prst="rect">
-            <a:avLst/>
-          </a:prstGeom>
-          <a:noFill/>
-        </p:spPr>
-        <p:txBody>
-          <a:bodyPr wrap="square" lIns="0" rIns="0" tIns="0" bIns="0" anchor="t">
-            <a:noAutofit/>
-          </a:bodyPr>
-          <a:lstStyle/>
-          <a:p>
-            <a:pPr algn="l" marL="182880" indent="-182880">
-              <a:spcAft>
-                <a:spcPts val="600"/>
-              </a:spcAft>
-              <a:buClr>
-                <a:schemeClr val="accent1"/>
-              </a:buClr>
-              <a:buFont typeface="Arial"/>
-              <a:buChar char="▪"/>
-            </a:pPr>
-            <a:r>
-              <a:rPr sz="1300" b="0" lang="en-GB">
-                <a:solidFill>
-                  <a:schemeClr val="tx1"/>
-                </a:solidFill>
-              </a:rPr>
-              <a:t>Weekly shop data, 3 countries × 156 weeks</a:t>
-            </a:r>
-          </a:p>
-          <a:p>
-            <a:pPr algn="l" marL="182880" indent="-182880">
-              <a:spcAft>
-                <a:spcPts val="600"/>
-              </a:spcAft>
-              <a:buClr>
-                <a:schemeClr val="accent1"/>
-              </a:buClr>
-              <a:buFont typeface="Arial"/>
-              <a:buChar char="▪"/>
-            </a:pPr>
-            <a:r>
-              <a:rPr sz="1300" b="0" lang="en-GB">
-                <a:solidFill>
-                  <a:schemeClr val="tx1"/>
-                </a:solidFill>
-              </a:rPr>
-              <a:t>Club subscribers</a:t>
-            </a:r>
-          </a:p>
-          <a:p>
-            <a:pPr algn="l" marL="182880" indent="-182880">
-              <a:spcAft>
-                <a:spcPts val="600"/>
-              </a:spcAft>
-              <a:buClr>
-                <a:schemeClr val="accent1"/>
-              </a:buClr>
-              <a:buFont typeface="Arial"/>
-              <a:buChar char="▪"/>
-            </a:pPr>
-            <a:r>
-              <a:rPr sz="1300" b="0" lang="en-GB">
-                <a:solidFill>
-                  <a:schemeClr val="tx1"/>
-                </a:solidFill>
-              </a:rPr>
-              <a:t>The Q1 2026 plan</a:t>
-            </a:r>
-          </a:p>
-        </p:txBody>
-      </p:sp>
-      <p:sp>
-        <p:nvSpPr>
-          <p:cNvPr id="24" name="Case card 3 body"/>
-          <p:cNvSpPr/>
-          <p:nvPr/>
-        </p:nvSpPr>
-        <p:spPr>
-          <a:xfrm>
-            <a:off x="6035040" y="2423160"/>
-            <a:ext cx="2651760" cy="1417320"/>
-          </a:xfrm>
-          <a:prstGeom prst="rect">
-            <a:avLst/>
-          </a:prstGeom>
-          <a:solidFill>
-            <a:schemeClr val="bg2"/>
-          </a:solidFill>
-          <a:ln>
-            <a:noFill/>
-          </a:ln>
-          <a:effectLst/>
-        </p:spPr>
-        <p:style>
-          <a:lnRef idx="1">
-            <a:schemeClr val="accent1"/>
-          </a:lnRef>
-          <a:fillRef idx="3">
-            <a:schemeClr val="accent1"/>
-          </a:fillRef>
-          <a:effectRef idx="2">
-            <a:schemeClr val="accent1"/>
-          </a:effectRef>
-          <a:fontRef idx="minor">
-            <a:schemeClr val="lt1"/>
-          </a:fontRef>
-        </p:style>
-        <p:txBody>
-          <a:bodyPr rtlCol="0" anchor="ctr"/>
-          <a:lstStyle/>
-          <a:p/>
-        </p:txBody>
-      </p:sp>
-      <p:sp>
-        <p:nvSpPr>
-          <p:cNvPr id="25" name="Case card 3 header"/>
-          <p:cNvSpPr/>
-          <p:nvPr/>
-        </p:nvSpPr>
-        <p:spPr>
-          <a:xfrm>
-            <a:off x="6035040" y="2011680"/>
-            <a:ext cx="2651760" cy="411480"/>
-          </a:xfrm>
-          <a:prstGeom prst="rect">
-            <a:avLst/>
-          </a:prstGeom>
-          <a:solidFill>
-            <a:schemeClr val="accent1"/>
-          </a:solidFill>
-          <a:ln>
-            <a:noFill/>
-          </a:ln>
-          <a:effectLst/>
-        </p:spPr>
-        <p:style>
-          <a:lnRef idx="1">
-            <a:schemeClr val="accent1"/>
-          </a:lnRef>
-          <a:fillRef idx="3">
-            <a:schemeClr val="accent1"/>
-          </a:fillRef>
-          <a:effectRef idx="2">
-            <a:schemeClr val="accent1"/>
-          </a:effectRef>
-          <a:fontRef idx="minor">
-            <a:schemeClr val="lt1"/>
-          </a:fontRef>
-        </p:style>
-        <p:txBody>
-          <a:bodyPr rtlCol="0" anchor="ctr"/>
-          <a:lstStyle/>
-          <a:p/>
-        </p:txBody>
-      </p:sp>
-      <p:sp>
-        <p:nvSpPr>
-          <p:cNvPr id="26" name="Case card 3 heading"/>
-          <p:cNvSpPr txBox="1"/>
-          <p:nvPr/>
-        </p:nvSpPr>
-        <p:spPr>
-          <a:xfrm>
-            <a:off x="6172200" y="2011680"/>
-            <a:ext cx="1965960" cy="411480"/>
-          </a:xfrm>
-          <a:prstGeom prst="rect">
-            <a:avLst/>
-          </a:prstGeom>
-          <a:noFill/>
-        </p:spPr>
-        <p:txBody>
-          <a:bodyPr wrap="square" lIns="0" rIns="0" tIns="0" bIns="0" anchor="ctr">
-            <a:noAutofit/>
-          </a:bodyPr>
-          <a:lstStyle/>
-          <a:p>
-            <a:pPr algn="l">
-              <a:spcAft>
-                <a:spcPts val="400"/>
-              </a:spcAft>
-            </a:pPr>
-            <a:r>
-              <a:rPr sz="1500" b="1" lang="en-GB">
+              </a:rPr>
+              <a:t>All decks and class files: </a:t>
+            </a:r>
+            <a:r>
+              <a:rPr sz="1200" b="0" lang="en-GB">
                 <a:solidFill>
                   <a:schemeClr val="bg1"/>
                 </a:solidFill>
-                <a:latin typeface="+mj-lt"/>
-              </a:rPr>
-              <a:t>You deliver</a:t>
-            </a:r>
-          </a:p>
-        </p:txBody>
-      </p:sp>
-      <p:pic>
-        <p:nvPicPr>
-          <p:cNvPr id="27" name="Icon Case card 3" descr=""/>
-          <p:cNvPicPr>
-            <a:picLocks noChangeAspect="1"/>
-          </p:cNvPicPr>
-          <p:nvPr/>
-        </p:nvPicPr>
-        <p:blipFill>
-          <a:blip r:embed="rId5"/>
-          <a:stretch>
-            <a:fillRect/>
-          </a:stretch>
-        </p:blipFill>
-        <p:spPr>
-          <a:xfrm>
-            <a:off x="8247888" y="2061972"/>
-            <a:ext cx="310896" cy="310896"/>
-          </a:xfrm>
-          <a:prstGeom prst="rect">
-            <a:avLst/>
-          </a:prstGeom>
-        </p:spPr>
-      </p:pic>
-      <p:sp>
-        <p:nvSpPr>
-          <p:cNvPr id="28" name="Case card 3 text"/>
-          <p:cNvSpPr txBox="1"/>
-          <p:nvPr/>
-        </p:nvSpPr>
-        <p:spPr>
-          <a:xfrm>
-            <a:off x="6199632" y="2560320"/>
-            <a:ext cx="2350008" cy="1143000"/>
-          </a:xfrm>
-          <a:prstGeom prst="rect">
-            <a:avLst/>
-          </a:prstGeom>
-          <a:noFill/>
-        </p:spPr>
-        <p:txBody>
-          <a:bodyPr wrap="square" lIns="0" rIns="0" tIns="0" bIns="0" anchor="t">
-            <a:noAutofit/>
-          </a:bodyPr>
-          <a:lstStyle/>
-          <a:p>
-            <a:pPr algn="l" marL="182880" indent="-182880">
-              <a:spcAft>
-                <a:spcPts val="600"/>
-              </a:spcAft>
-              <a:buClr>
-                <a:schemeClr val="accent1"/>
-              </a:buClr>
-              <a:buFont typeface="Arial"/>
-              <a:buChar char="▪"/>
-            </a:pPr>
-            <a:r>
-              <a:rPr sz="1300" b="0" lang="en-GB">
-                <a:solidFill>
-                  <a:schemeClr val="tx1"/>
-                </a:solidFill>
-              </a:rPr>
-              <a:t>A Quarto report with all code</a:t>
-            </a:r>
-          </a:p>
-          <a:p>
-            <a:pPr algn="l" marL="182880" indent="-182880">
-              <a:spcAft>
-                <a:spcPts val="600"/>
-              </a:spcAft>
-              <a:buClr>
-                <a:schemeClr val="accent1"/>
-              </a:buClr>
-              <a:buFont typeface="Arial"/>
-              <a:buChar char="▪"/>
-            </a:pPr>
-            <a:r>
-              <a:rPr sz="1300" b="0" lang="en-GB">
-                <a:solidFill>
-                  <a:schemeClr val="tx1"/>
-                </a:solidFill>
-              </a:rPr>
-              <a:t>Groups of at most 4</a:t>
-            </a:r>
-          </a:p>
-          <a:p>
-            <a:pPr algn="l" marL="182880" indent="-182880">
-              <a:spcAft>
-                <a:spcPts val="600"/>
-              </a:spcAft>
-              <a:buClr>
-                <a:schemeClr val="accent1"/>
-              </a:buClr>
-              <a:buFont typeface="Arial"/>
-              <a:buChar char="▪"/>
-            </a:pPr>
-            <a:r>
-              <a:rPr sz="1300" b="0" lang="en-GB">
-                <a:solidFill>
-                  <a:schemeClr val="tx1"/>
-                </a:solidFill>
-              </a:rPr>
-              <a:t>30 % of the grade</a:t>
-            </a:r>
-          </a:p>
-        </p:txBody>
-      </p:sp>
-      <p:sp>
-        <p:nvSpPr>
-          <p:cNvPr id="29" name="Case rule box"/>
-          <p:cNvSpPr/>
-          <p:nvPr/>
-        </p:nvSpPr>
-        <p:spPr>
-          <a:xfrm>
-            <a:off x="457200" y="4005072"/>
-            <a:ext cx="8229600" cy="685800"/>
-          </a:xfrm>
-          <a:prstGeom prst="rect">
-            <a:avLst/>
-          </a:prstGeom>
-          <a:solidFill>
-            <a:schemeClr val="tx2"/>
-          </a:solidFill>
-          <a:ln>
-            <a:noFill/>
-          </a:ln>
-          <a:effectLst/>
-        </p:spPr>
-        <p:style>
-          <a:lnRef idx="1">
-            <a:schemeClr val="accent1"/>
-          </a:lnRef>
-          <a:fillRef idx="3">
-            <a:schemeClr val="accent1"/>
-          </a:fillRef>
-          <a:effectRef idx="2">
-            <a:schemeClr val="accent1"/>
-          </a:effectRef>
-          <a:fontRef idx="minor">
-            <a:schemeClr val="lt1"/>
-          </a:fontRef>
-        </p:style>
-        <p:txBody>
-          <a:bodyPr rtlCol="0" anchor="ctr"/>
-          <a:lstStyle/>
-          <a:p/>
-        </p:txBody>
-      </p:sp>
-      <p:pic>
-        <p:nvPicPr>
-          <p:cNvPr id="30" name="Icon Case rule" descr=""/>
-          <p:cNvPicPr>
-            <a:picLocks noChangeAspect="1"/>
-          </p:cNvPicPr>
-          <p:nvPr/>
-        </p:nvPicPr>
-        <p:blipFill>
-          <a:blip r:embed="rId6"/>
-          <a:stretch>
-            <a:fillRect/>
-          </a:stretch>
-        </p:blipFill>
-        <p:spPr>
-          <a:xfrm>
-            <a:off x="658368" y="4165092"/>
-            <a:ext cx="365760" cy="365760"/>
-          </a:xfrm>
-          <a:prstGeom prst="rect">
-            <a:avLst/>
-          </a:prstGeom>
-        </p:spPr>
-      </p:pic>
-      <p:sp>
-        <p:nvSpPr>
-          <p:cNvPr id="31" name="Case rule text"/>
-          <p:cNvSpPr txBox="1"/>
-          <p:nvPr/>
-        </p:nvSpPr>
-        <p:spPr>
-          <a:xfrm>
-            <a:off x="1207008" y="4005072"/>
-            <a:ext cx="7315200" cy="685800"/>
-          </a:xfrm>
-          <a:prstGeom prst="rect">
-            <a:avLst/>
-          </a:prstGeom>
-          <a:noFill/>
-        </p:spPr>
-        <p:txBody>
-          <a:bodyPr wrap="square" lIns="0" rIns="0" tIns="0" bIns="0" anchor="ctr">
-            <a:noAutofit/>
-          </a:bodyPr>
-          <a:lstStyle/>
-          <a:p>
-            <a:pPr algn="l">
-              <a:spcAft>
-                <a:spcPts val="400"/>
-              </a:spcAft>
-            </a:pPr>
-            <a:r>
-              <a:rPr sz="1200" b="1" lang="en-GB">
-                <a:solidFill>
-                  <a:schemeClr val="bg1"/>
-                </a:solidFill>
-              </a:rPr>
-              <a:t>Every number from code: </a:t>
-            </a:r>
-            <a:r>
-              <a:rPr sz="1200" b="0" lang="en-GB">
-                <a:solidFill>
-                  <a:schemeClr val="bg1"/>
-                </a:solidFill>
-              </a:rPr>
-              <a:t>the report renders from a fresh copy of your project folder.</a:t>
-            </a:r>
-          </a:p>
-        </p:txBody>
-      </p:sp>
-      <p:sp>
-        <p:nvSpPr>
-          <p:cNvPr id="32" name="Case where"/>
-          <p:cNvSpPr txBox="1"/>
-          <p:nvPr/>
-        </p:nvSpPr>
-        <p:spPr>
-          <a:xfrm>
-            <a:off x="457200" y="4754880"/>
-            <a:ext cx="8229600" cy="292608"/>
-          </a:xfrm>
-          <a:prstGeom prst="rect">
-            <a:avLst/>
-          </a:prstGeom>
-          <a:noFill/>
-        </p:spPr>
-        <p:txBody>
-          <a:bodyPr wrap="square" lIns="0" rIns="0" tIns="0" bIns="0" anchor="ctr">
-            <a:noAutofit/>
-          </a:bodyPr>
-          <a:lstStyle/>
-          <a:p>
-            <a:pPr algn="l">
-              <a:spcAft>
-                <a:spcPts val="400"/>
-              </a:spcAft>
-            </a:pPr>
-            <a:r>
-              <a:rPr sz="1200" b="1" lang="en-GB">
-                <a:solidFill>
-                  <a:schemeClr val="tx2"/>
-                </a:solidFill>
-              </a:rPr>
-              <a:t>Brief, data and assessment criteria: </a:t>
-            </a:r>
-            <a:r>
-              <a:rPr sz="1200" b="0" lang="en-GB">
-                <a:solidFill>
-                  <a:schemeClr val="tx2"/>
-                </a:solidFill>
-                <a:latin typeface="Consolas"/>
-              </a:rPr>
-              <a:t>assignments/group-project/ and Canvas</a:t>
+              </a:rPr>
+              <a:t>the course repository; pull it before every session.</a:t>
             </a:r>
           </a:p>
         </p:txBody>
@@ -44062,7 +43360,7 @@
           <a:p>
             <a:r>
               <a:rPr sz="1600" lang="en-GB"/>
-              <a:t>Key takeaways</a:t>
+              <a:t>The group case study</a:t>
             </a:r>
           </a:p>
         </p:txBody>
@@ -44118,17 +43416,19 @@
       </p:sp>
       <p:sp>
         <p:nvSpPr>
-          <p:cNvPr id="10" name="Takeaways row 1"/>
+          <p:cNvPr id="10" name="Case steps step 1"/>
           <p:cNvSpPr/>
           <p:nvPr/>
         </p:nvSpPr>
         <p:spPr>
           <a:xfrm>
             <a:off x="457200" y="1234440"/>
-            <a:ext cx="8229600" cy="585216"/>
-          </a:xfrm>
-          <a:prstGeom prst="rect">
-            <a:avLst/>
+            <a:ext cx="2139696" cy="603504"/>
+          </a:xfrm>
+          <a:prstGeom prst="homePlate">
+            <a:avLst>
+              <a:gd name="adj" fmla="val 28000"/>
+            </a:avLst>
           </a:prstGeom>
           <a:solidFill>
             <a:schemeClr val="bg2"/>
@@ -44153,6 +43453,256 @@
           </a:fontRef>
         </p:style>
         <p:txBody>
+          <a:bodyPr rtlCol="0" anchor="ctr" wrap="square" rIns="128016" tIns="18288" bIns="18288"/>
+          <a:lstStyle/>
+          <a:p>
+            <a:pPr algn="ctr"/>
+            <a:r>
+              <a:rPr sz="1200" b="1" lang="en-GB">
+                <a:solidFill>
+                  <a:schemeClr val="tx2"/>
+                </a:solidFill>
+              </a:rPr>
+              <a:t>S1: what drives</a:t>
+            </a:r>
+            <a:br/>
+            <a:r>
+              <a:rPr sz="1200" b="1" lang="en-GB">
+                <a:solidFill>
+                  <a:schemeClr val="tx2"/>
+                </a:solidFill>
+              </a:rPr>
+              <a:t>weekly orders?</a:t>
+            </a:r>
+          </a:p>
+        </p:txBody>
+      </p:sp>
+      <p:sp>
+        <p:nvSpPr>
+          <p:cNvPr id="11" name="Case steps step 2"/>
+          <p:cNvSpPr/>
+          <p:nvPr/>
+        </p:nvSpPr>
+        <p:spPr>
+          <a:xfrm>
+            <a:off x="2487168" y="1234440"/>
+            <a:ext cx="2139696" cy="603504"/>
+          </a:xfrm>
+          <a:prstGeom prst="chevron">
+            <a:avLst>
+              <a:gd name="adj" fmla="val 28000"/>
+            </a:avLst>
+          </a:prstGeom>
+          <a:solidFill>
+            <a:schemeClr val="bg2"/>
+          </a:solidFill>
+          <a:ln>
+            <a:noFill/>
+          </a:ln>
+          <a:effectLst/>
+        </p:spPr>
+        <p:style>
+          <a:lnRef idx="1">
+            <a:schemeClr val="accent1"/>
+          </a:lnRef>
+          <a:fillRef idx="3">
+            <a:schemeClr val="accent1"/>
+          </a:fillRef>
+          <a:effectRef idx="2">
+            <a:schemeClr val="accent1"/>
+          </a:effectRef>
+          <a:fontRef idx="minor">
+            <a:schemeClr val="lt1"/>
+          </a:fontRef>
+        </p:style>
+        <p:txBody>
+          <a:bodyPr rtlCol="0" anchor="ctr" wrap="square" lIns="237744" rIns="128016" tIns="18288" bIns="18288"/>
+          <a:lstStyle/>
+          <a:p>
+            <a:pPr algn="ctr"/>
+            <a:r>
+              <a:rPr sz="1200" b="1" lang="en-GB">
+                <a:solidFill>
+                  <a:schemeClr val="tx2"/>
+                </a:solidFill>
+              </a:rPr>
+              <a:t>S2: price and</a:t>
+            </a:r>
+            <a:br/>
+            <a:r>
+              <a:rPr sz="1200" b="1" lang="en-GB">
+                <a:solidFill>
+                  <a:schemeClr val="tx2"/>
+                </a:solidFill>
+              </a:rPr>
+              <a:t>advertising</a:t>
+            </a:r>
+          </a:p>
+        </p:txBody>
+      </p:sp>
+      <p:sp>
+        <p:nvSpPr>
+          <p:cNvPr id="12" name="Case steps step 3"/>
+          <p:cNvSpPr/>
+          <p:nvPr/>
+        </p:nvSpPr>
+        <p:spPr>
+          <a:xfrm>
+            <a:off x="4517136" y="1234440"/>
+            <a:ext cx="2139696" cy="603504"/>
+          </a:xfrm>
+          <a:prstGeom prst="chevron">
+            <a:avLst>
+              <a:gd name="adj" fmla="val 28000"/>
+            </a:avLst>
+          </a:prstGeom>
+          <a:solidFill>
+            <a:schemeClr val="bg2"/>
+          </a:solidFill>
+          <a:ln>
+            <a:noFill/>
+          </a:ln>
+          <a:effectLst/>
+        </p:spPr>
+        <p:style>
+          <a:lnRef idx="1">
+            <a:schemeClr val="accent1"/>
+          </a:lnRef>
+          <a:fillRef idx="3">
+            <a:schemeClr val="accent1"/>
+          </a:fillRef>
+          <a:effectRef idx="2">
+            <a:schemeClr val="accent1"/>
+          </a:effectRef>
+          <a:fontRef idx="minor">
+            <a:schemeClr val="lt1"/>
+          </a:fontRef>
+        </p:style>
+        <p:txBody>
+          <a:bodyPr rtlCol="0" anchor="ctr" wrap="square" lIns="237744" rIns="128016" tIns="18288" bIns="18288"/>
+          <a:lstStyle/>
+          <a:p>
+            <a:pPr algn="ctr"/>
+            <a:r>
+              <a:rPr sz="1200" b="1" lang="en-GB">
+                <a:solidFill>
+                  <a:schemeClr val="tx2"/>
+                </a:solidFill>
+              </a:rPr>
+              <a:t>S3: who will</a:t>
+            </a:r>
+            <a:br/>
+            <a:r>
+              <a:rPr sz="1200" b="1" lang="en-GB">
+                <a:solidFill>
+                  <a:schemeClr val="tx2"/>
+                </a:solidFill>
+              </a:rPr>
+              <a:t>cancel?</a:t>
+            </a:r>
+          </a:p>
+        </p:txBody>
+      </p:sp>
+      <p:sp>
+        <p:nvSpPr>
+          <p:cNvPr id="13" name="Case steps step 4"/>
+          <p:cNvSpPr/>
+          <p:nvPr/>
+        </p:nvSpPr>
+        <p:spPr>
+          <a:xfrm>
+            <a:off x="6547104" y="1234440"/>
+            <a:ext cx="2139696" cy="603504"/>
+          </a:xfrm>
+          <a:prstGeom prst="chevron">
+            <a:avLst>
+              <a:gd name="adj" fmla="val 28000"/>
+            </a:avLst>
+          </a:prstGeom>
+          <a:solidFill>
+            <a:schemeClr val="bg2"/>
+          </a:solidFill>
+          <a:ln>
+            <a:noFill/>
+          </a:ln>
+          <a:effectLst/>
+        </p:spPr>
+        <p:style>
+          <a:lnRef idx="1">
+            <a:schemeClr val="accent1"/>
+          </a:lnRef>
+          <a:fillRef idx="3">
+            <a:schemeClr val="accent1"/>
+          </a:fillRef>
+          <a:effectRef idx="2">
+            <a:schemeClr val="accent1"/>
+          </a:effectRef>
+          <a:fontRef idx="minor">
+            <a:schemeClr val="lt1"/>
+          </a:fontRef>
+        </p:style>
+        <p:txBody>
+          <a:bodyPr rtlCol="0" anchor="ctr" wrap="square" lIns="237744" rIns="128016" tIns="18288" bIns="18288"/>
+          <a:lstStyle/>
+          <a:p>
+            <a:pPr algn="ctr"/>
+            <a:r>
+              <a:rPr sz="1200" b="1" lang="en-GB">
+                <a:solidFill>
+                  <a:schemeClr val="tx2"/>
+                </a:solidFill>
+              </a:rPr>
+              <a:t>S4: Q1 2026</a:t>
+            </a:r>
+            <a:br/>
+            <a:r>
+              <a:rPr sz="1200" b="1" lang="en-GB">
+                <a:solidFill>
+                  <a:schemeClr val="tx2"/>
+                </a:solidFill>
+              </a:rPr>
+              <a:t>baseline</a:t>
+            </a:r>
+          </a:p>
+        </p:txBody>
+      </p:sp>
+      <p:sp>
+        <p:nvSpPr>
+          <p:cNvPr id="14" name="Case card 1 body"/>
+          <p:cNvSpPr/>
+          <p:nvPr/>
+        </p:nvSpPr>
+        <p:spPr>
+          <a:xfrm>
+            <a:off x="457200" y="2423160"/>
+            <a:ext cx="2651760" cy="1417320"/>
+          </a:xfrm>
+          <a:prstGeom prst="rect">
+            <a:avLst/>
+          </a:prstGeom>
+          <a:solidFill>
+            <a:schemeClr val="bg2"/>
+          </a:solidFill>
+          <a:ln>
+            <a:noFill/>
+          </a:ln>
+          <a:effectLst/>
+        </p:spPr>
+        <p:style>
+          <a:lnRef idx="1">
+            <a:schemeClr val="accent1"/>
+          </a:lnRef>
+          <a:fillRef idx="3">
+            <a:schemeClr val="accent1"/>
+          </a:fillRef>
+          <a:effectRef idx="2">
+            <a:schemeClr val="accent1"/>
+          </a:effectRef>
+          <a:fontRef idx="minor">
+            <a:schemeClr val="lt1"/>
+          </a:fontRef>
+        </p:style>
+        <p:txBody>
           <a:bodyPr rtlCol="0" anchor="ctr"/>
           <a:lstStyle/>
           <a:p/>
@@ -44160,16 +43710,644 @@
       </p:sp>
       <p:sp>
         <p:nvSpPr>
-          <p:cNvPr id="11" name="Takeaways number 1"/>
+          <p:cNvPr id="15" name="Case card 1 header"/>
           <p:cNvSpPr/>
           <p:nvPr/>
         </p:nvSpPr>
         <p:spPr>
           <a:xfrm>
-            <a:off x="594360" y="1371600"/>
+            <a:off x="457200" y="2011680"/>
+            <a:ext cx="2651760" cy="411480"/>
+          </a:xfrm>
+          <a:prstGeom prst="rect">
+            <a:avLst/>
+          </a:prstGeom>
+          <a:solidFill>
+            <a:schemeClr val="accent1"/>
+          </a:solidFill>
+          <a:ln>
+            <a:noFill/>
+          </a:ln>
+          <a:effectLst/>
+        </p:spPr>
+        <p:style>
+          <a:lnRef idx="1">
+            <a:schemeClr val="accent1"/>
+          </a:lnRef>
+          <a:fillRef idx="3">
+            <a:schemeClr val="accent1"/>
+          </a:fillRef>
+          <a:effectRef idx="2">
+            <a:schemeClr val="accent1"/>
+          </a:effectRef>
+          <a:fontRef idx="minor">
+            <a:schemeClr val="lt1"/>
+          </a:fontRef>
+        </p:style>
+        <p:txBody>
+          <a:bodyPr rtlCol="0" anchor="ctr"/>
+          <a:lstStyle/>
+          <a:p/>
+        </p:txBody>
+      </p:sp>
+      <p:sp>
+        <p:nvSpPr>
+          <p:cNvPr id="16" name="Case card 1 heading"/>
+          <p:cNvSpPr txBox="1"/>
+          <p:nvPr/>
+        </p:nvSpPr>
+        <p:spPr>
+          <a:xfrm>
+            <a:off x="594360" y="2011680"/>
+            <a:ext cx="1965960" cy="411480"/>
+          </a:xfrm>
+          <a:prstGeom prst="rect">
+            <a:avLst/>
+          </a:prstGeom>
+          <a:noFill/>
+        </p:spPr>
+        <p:txBody>
+          <a:bodyPr wrap="square" lIns="0" rIns="0" tIns="0" bIns="0" anchor="ctr">
+            <a:noAutofit/>
+          </a:bodyPr>
+          <a:lstStyle/>
+          <a:p>
+            <a:pPr algn="l">
+              <a:spcAft>
+                <a:spcPts val="400"/>
+              </a:spcAft>
+            </a:pPr>
+            <a:r>
+              <a:rPr sz="1500" b="1" lang="en-GB">
+                <a:solidFill>
+                  <a:schemeClr val="bg1"/>
+                </a:solidFill>
+                <a:latin typeface="+mj-lt"/>
+              </a:rPr>
+              <a:t>The brief</a:t>
+            </a:r>
+          </a:p>
+        </p:txBody>
+      </p:sp>
+      <p:pic>
+        <p:nvPicPr>
+          <p:cNvPr id="17" name="Icon Case card 1" descr=""/>
+          <p:cNvPicPr>
+            <a:picLocks noChangeAspect="1"/>
+          </p:cNvPicPr>
+          <p:nvPr/>
+        </p:nvPicPr>
+        <p:blipFill>
+          <a:blip r:embed="rId3"/>
+          <a:stretch>
+            <a:fillRect/>
+          </a:stretch>
+        </p:blipFill>
+        <p:spPr>
+          <a:xfrm>
+            <a:off x="2670048" y="2061972"/>
             <a:ext cx="310896" cy="310896"/>
           </a:xfrm>
-          <a:prstGeom prst="ellipse">
+          <a:prstGeom prst="rect">
+            <a:avLst/>
+          </a:prstGeom>
+        </p:spPr>
+      </p:pic>
+      <p:sp>
+        <p:nvSpPr>
+          <p:cNvPr id="18" name="Case card 1 text"/>
+          <p:cNvSpPr txBox="1"/>
+          <p:nvPr/>
+        </p:nvSpPr>
+        <p:spPr>
+          <a:xfrm>
+            <a:off x="621792" y="2560320"/>
+            <a:ext cx="2350008" cy="1143000"/>
+          </a:xfrm>
+          <a:prstGeom prst="rect">
+            <a:avLst/>
+          </a:prstGeom>
+          <a:noFill/>
+        </p:spPr>
+        <p:txBody>
+          <a:bodyPr wrap="square" lIns="0" rIns="0" tIns="0" bIns="0" anchor="t">
+            <a:noAutofit/>
+          </a:bodyPr>
+          <a:lstStyle/>
+          <a:p>
+            <a:pPr algn="l" marL="182880" indent="-182880">
+              <a:spcAft>
+                <a:spcPts val="600"/>
+              </a:spcAft>
+              <a:buClr>
+                <a:schemeClr val="accent1"/>
+              </a:buClr>
+              <a:buFont typeface="Arial"/>
+              <a:buChar char="▪"/>
+            </a:pPr>
+            <a:r>
+              <a:rPr sz="1300" b="0" lang="en-GB">
+                <a:solidFill>
+                  <a:schemeClr val="tx1"/>
+                </a:solidFill>
+              </a:rPr>
+              <a:t>Alpenglow's web shop in AT, DE and CH</a:t>
+            </a:r>
+          </a:p>
+          <a:p>
+            <a:pPr algn="l" marL="182880" indent="-182880">
+              <a:spcAft>
+                <a:spcPts val="600"/>
+              </a:spcAft>
+              <a:buClr>
+                <a:schemeClr val="accent1"/>
+              </a:buClr>
+              <a:buFont typeface="Arial"/>
+              <a:buChar char="▪"/>
+            </a:pPr>
+            <a:r>
+              <a:rPr sz="1300" b="0" lang="en-GB">
+                <a:solidFill>
+                  <a:schemeClr val="tx1"/>
+                </a:solidFill>
+              </a:rPr>
+              <a:t>Four questions from the Head of E-commerce</a:t>
+            </a:r>
+          </a:p>
+        </p:txBody>
+      </p:sp>
+      <p:sp>
+        <p:nvSpPr>
+          <p:cNvPr id="19" name="Case card 2 body"/>
+          <p:cNvSpPr/>
+          <p:nvPr/>
+        </p:nvSpPr>
+        <p:spPr>
+          <a:xfrm>
+            <a:off x="3246120" y="2423160"/>
+            <a:ext cx="2651760" cy="1417320"/>
+          </a:xfrm>
+          <a:prstGeom prst="rect">
+            <a:avLst/>
+          </a:prstGeom>
+          <a:solidFill>
+            <a:schemeClr val="bg2"/>
+          </a:solidFill>
+          <a:ln>
+            <a:noFill/>
+          </a:ln>
+          <a:effectLst/>
+        </p:spPr>
+        <p:style>
+          <a:lnRef idx="1">
+            <a:schemeClr val="accent1"/>
+          </a:lnRef>
+          <a:fillRef idx="3">
+            <a:schemeClr val="accent1"/>
+          </a:fillRef>
+          <a:effectRef idx="2">
+            <a:schemeClr val="accent1"/>
+          </a:effectRef>
+          <a:fontRef idx="minor">
+            <a:schemeClr val="lt1"/>
+          </a:fontRef>
+        </p:style>
+        <p:txBody>
+          <a:bodyPr rtlCol="0" anchor="ctr"/>
+          <a:lstStyle/>
+          <a:p/>
+        </p:txBody>
+      </p:sp>
+      <p:sp>
+        <p:nvSpPr>
+          <p:cNvPr id="20" name="Case card 2 header"/>
+          <p:cNvSpPr/>
+          <p:nvPr/>
+        </p:nvSpPr>
+        <p:spPr>
+          <a:xfrm>
+            <a:off x="3246120" y="2011680"/>
+            <a:ext cx="2651760" cy="411480"/>
+          </a:xfrm>
+          <a:prstGeom prst="rect">
+            <a:avLst/>
+          </a:prstGeom>
+          <a:solidFill>
+            <a:schemeClr val="accent1"/>
+          </a:solidFill>
+          <a:ln>
+            <a:noFill/>
+          </a:ln>
+          <a:effectLst/>
+        </p:spPr>
+        <p:style>
+          <a:lnRef idx="1">
+            <a:schemeClr val="accent1"/>
+          </a:lnRef>
+          <a:fillRef idx="3">
+            <a:schemeClr val="accent1"/>
+          </a:fillRef>
+          <a:effectRef idx="2">
+            <a:schemeClr val="accent1"/>
+          </a:effectRef>
+          <a:fontRef idx="minor">
+            <a:schemeClr val="lt1"/>
+          </a:fontRef>
+        </p:style>
+        <p:txBody>
+          <a:bodyPr rtlCol="0" anchor="ctr"/>
+          <a:lstStyle/>
+          <a:p/>
+        </p:txBody>
+      </p:sp>
+      <p:sp>
+        <p:nvSpPr>
+          <p:cNvPr id="21" name="Case card 2 heading"/>
+          <p:cNvSpPr txBox="1"/>
+          <p:nvPr/>
+        </p:nvSpPr>
+        <p:spPr>
+          <a:xfrm>
+            <a:off x="3383280" y="2011680"/>
+            <a:ext cx="1965960" cy="411480"/>
+          </a:xfrm>
+          <a:prstGeom prst="rect">
+            <a:avLst/>
+          </a:prstGeom>
+          <a:noFill/>
+        </p:spPr>
+        <p:txBody>
+          <a:bodyPr wrap="square" lIns="0" rIns="0" tIns="0" bIns="0" anchor="ctr">
+            <a:noAutofit/>
+          </a:bodyPr>
+          <a:lstStyle/>
+          <a:p>
+            <a:pPr algn="l">
+              <a:spcAft>
+                <a:spcPts val="400"/>
+              </a:spcAft>
+            </a:pPr>
+            <a:r>
+              <a:rPr sz="1500" b="1" lang="en-GB">
+                <a:solidFill>
+                  <a:schemeClr val="bg1"/>
+                </a:solidFill>
+                <a:latin typeface="+mj-lt"/>
+              </a:rPr>
+              <a:t>The data</a:t>
+            </a:r>
+          </a:p>
+        </p:txBody>
+      </p:sp>
+      <p:pic>
+        <p:nvPicPr>
+          <p:cNvPr id="22" name="Icon Case card 2" descr=""/>
+          <p:cNvPicPr>
+            <a:picLocks noChangeAspect="1"/>
+          </p:cNvPicPr>
+          <p:nvPr/>
+        </p:nvPicPr>
+        <p:blipFill>
+          <a:blip r:embed="rId4"/>
+          <a:stretch>
+            <a:fillRect/>
+          </a:stretch>
+        </p:blipFill>
+        <p:spPr>
+          <a:xfrm>
+            <a:off x="5458968" y="2061972"/>
+            <a:ext cx="310896" cy="310896"/>
+          </a:xfrm>
+          <a:prstGeom prst="rect">
+            <a:avLst/>
+          </a:prstGeom>
+        </p:spPr>
+      </p:pic>
+      <p:sp>
+        <p:nvSpPr>
+          <p:cNvPr id="23" name="Case card 2 text"/>
+          <p:cNvSpPr txBox="1"/>
+          <p:nvPr/>
+        </p:nvSpPr>
+        <p:spPr>
+          <a:xfrm>
+            <a:off x="3410712" y="2560320"/>
+            <a:ext cx="2350008" cy="1143000"/>
+          </a:xfrm>
+          <a:prstGeom prst="rect">
+            <a:avLst/>
+          </a:prstGeom>
+          <a:noFill/>
+        </p:spPr>
+        <p:txBody>
+          <a:bodyPr wrap="square" lIns="0" rIns="0" tIns="0" bIns="0" anchor="t">
+            <a:noAutofit/>
+          </a:bodyPr>
+          <a:lstStyle/>
+          <a:p>
+            <a:pPr algn="l" marL="182880" indent="-182880">
+              <a:spcAft>
+                <a:spcPts val="600"/>
+              </a:spcAft>
+              <a:buClr>
+                <a:schemeClr val="accent1"/>
+              </a:buClr>
+              <a:buFont typeface="Arial"/>
+              <a:buChar char="▪"/>
+            </a:pPr>
+            <a:r>
+              <a:rPr sz="1300" b="0" lang="en-GB">
+                <a:solidFill>
+                  <a:schemeClr val="tx1"/>
+                </a:solidFill>
+              </a:rPr>
+              <a:t>Weekly shop data, 3 countries × 156 weeks</a:t>
+            </a:r>
+          </a:p>
+          <a:p>
+            <a:pPr algn="l" marL="182880" indent="-182880">
+              <a:spcAft>
+                <a:spcPts val="600"/>
+              </a:spcAft>
+              <a:buClr>
+                <a:schemeClr val="accent1"/>
+              </a:buClr>
+              <a:buFont typeface="Arial"/>
+              <a:buChar char="▪"/>
+            </a:pPr>
+            <a:r>
+              <a:rPr sz="1300" b="0" lang="en-GB">
+                <a:solidFill>
+                  <a:schemeClr val="tx1"/>
+                </a:solidFill>
+              </a:rPr>
+              <a:t>Club subscribers</a:t>
+            </a:r>
+          </a:p>
+          <a:p>
+            <a:pPr algn="l" marL="182880" indent="-182880">
+              <a:spcAft>
+                <a:spcPts val="600"/>
+              </a:spcAft>
+              <a:buClr>
+                <a:schemeClr val="accent1"/>
+              </a:buClr>
+              <a:buFont typeface="Arial"/>
+              <a:buChar char="▪"/>
+            </a:pPr>
+            <a:r>
+              <a:rPr sz="1300" b="0" lang="en-GB">
+                <a:solidFill>
+                  <a:schemeClr val="tx1"/>
+                </a:solidFill>
+              </a:rPr>
+              <a:t>The Q1 2026 plan</a:t>
+            </a:r>
+          </a:p>
+        </p:txBody>
+      </p:sp>
+      <p:sp>
+        <p:nvSpPr>
+          <p:cNvPr id="24" name="Case card 3 body"/>
+          <p:cNvSpPr/>
+          <p:nvPr/>
+        </p:nvSpPr>
+        <p:spPr>
+          <a:xfrm>
+            <a:off x="6035040" y="2423160"/>
+            <a:ext cx="2651760" cy="1417320"/>
+          </a:xfrm>
+          <a:prstGeom prst="rect">
+            <a:avLst/>
+          </a:prstGeom>
+          <a:solidFill>
+            <a:schemeClr val="bg2"/>
+          </a:solidFill>
+          <a:ln>
+            <a:noFill/>
+          </a:ln>
+          <a:effectLst/>
+        </p:spPr>
+        <p:style>
+          <a:lnRef idx="1">
+            <a:schemeClr val="accent1"/>
+          </a:lnRef>
+          <a:fillRef idx="3">
+            <a:schemeClr val="accent1"/>
+          </a:fillRef>
+          <a:effectRef idx="2">
+            <a:schemeClr val="accent1"/>
+          </a:effectRef>
+          <a:fontRef idx="minor">
+            <a:schemeClr val="lt1"/>
+          </a:fontRef>
+        </p:style>
+        <p:txBody>
+          <a:bodyPr rtlCol="0" anchor="ctr"/>
+          <a:lstStyle/>
+          <a:p/>
+        </p:txBody>
+      </p:sp>
+      <p:sp>
+        <p:nvSpPr>
+          <p:cNvPr id="25" name="Case card 3 header"/>
+          <p:cNvSpPr/>
+          <p:nvPr/>
+        </p:nvSpPr>
+        <p:spPr>
+          <a:xfrm>
+            <a:off x="6035040" y="2011680"/>
+            <a:ext cx="2651760" cy="411480"/>
+          </a:xfrm>
+          <a:prstGeom prst="rect">
+            <a:avLst/>
+          </a:prstGeom>
+          <a:solidFill>
+            <a:schemeClr val="accent1"/>
+          </a:solidFill>
+          <a:ln>
+            <a:noFill/>
+          </a:ln>
+          <a:effectLst/>
+        </p:spPr>
+        <p:style>
+          <a:lnRef idx="1">
+            <a:schemeClr val="accent1"/>
+          </a:lnRef>
+          <a:fillRef idx="3">
+            <a:schemeClr val="accent1"/>
+          </a:fillRef>
+          <a:effectRef idx="2">
+            <a:schemeClr val="accent1"/>
+          </a:effectRef>
+          <a:fontRef idx="minor">
+            <a:schemeClr val="lt1"/>
+          </a:fontRef>
+        </p:style>
+        <p:txBody>
+          <a:bodyPr rtlCol="0" anchor="ctr"/>
+          <a:lstStyle/>
+          <a:p/>
+        </p:txBody>
+      </p:sp>
+      <p:sp>
+        <p:nvSpPr>
+          <p:cNvPr id="26" name="Case card 3 heading"/>
+          <p:cNvSpPr txBox="1"/>
+          <p:nvPr/>
+        </p:nvSpPr>
+        <p:spPr>
+          <a:xfrm>
+            <a:off x="6172200" y="2011680"/>
+            <a:ext cx="1965960" cy="411480"/>
+          </a:xfrm>
+          <a:prstGeom prst="rect">
+            <a:avLst/>
+          </a:prstGeom>
+          <a:noFill/>
+        </p:spPr>
+        <p:txBody>
+          <a:bodyPr wrap="square" lIns="0" rIns="0" tIns="0" bIns="0" anchor="ctr">
+            <a:noAutofit/>
+          </a:bodyPr>
+          <a:lstStyle/>
+          <a:p>
+            <a:pPr algn="l">
+              <a:spcAft>
+                <a:spcPts val="400"/>
+              </a:spcAft>
+            </a:pPr>
+            <a:r>
+              <a:rPr sz="1500" b="1" lang="en-GB">
+                <a:solidFill>
+                  <a:schemeClr val="bg1"/>
+                </a:solidFill>
+                <a:latin typeface="+mj-lt"/>
+              </a:rPr>
+              <a:t>You deliver</a:t>
+            </a:r>
+          </a:p>
+        </p:txBody>
+      </p:sp>
+      <p:pic>
+        <p:nvPicPr>
+          <p:cNvPr id="27" name="Icon Case card 3" descr=""/>
+          <p:cNvPicPr>
+            <a:picLocks noChangeAspect="1"/>
+          </p:cNvPicPr>
+          <p:nvPr/>
+        </p:nvPicPr>
+        <p:blipFill>
+          <a:blip r:embed="rId5"/>
+          <a:stretch>
+            <a:fillRect/>
+          </a:stretch>
+        </p:blipFill>
+        <p:spPr>
+          <a:xfrm>
+            <a:off x="8247888" y="2061972"/>
+            <a:ext cx="310896" cy="310896"/>
+          </a:xfrm>
+          <a:prstGeom prst="rect">
+            <a:avLst/>
+          </a:prstGeom>
+        </p:spPr>
+      </p:pic>
+      <p:sp>
+        <p:nvSpPr>
+          <p:cNvPr id="28" name="Case card 3 text"/>
+          <p:cNvSpPr txBox="1"/>
+          <p:nvPr/>
+        </p:nvSpPr>
+        <p:spPr>
+          <a:xfrm>
+            <a:off x="6199632" y="2560320"/>
+            <a:ext cx="2350008" cy="1143000"/>
+          </a:xfrm>
+          <a:prstGeom prst="rect">
+            <a:avLst/>
+          </a:prstGeom>
+          <a:noFill/>
+        </p:spPr>
+        <p:txBody>
+          <a:bodyPr wrap="square" lIns="0" rIns="0" tIns="0" bIns="0" anchor="t">
+            <a:noAutofit/>
+          </a:bodyPr>
+          <a:lstStyle/>
+          <a:p>
+            <a:pPr algn="l" marL="182880" indent="-182880">
+              <a:spcAft>
+                <a:spcPts val="600"/>
+              </a:spcAft>
+              <a:buClr>
+                <a:schemeClr val="accent1"/>
+              </a:buClr>
+              <a:buFont typeface="Arial"/>
+              <a:buChar char="▪"/>
+            </a:pPr>
+            <a:r>
+              <a:rPr sz="1300" b="0" lang="en-GB">
+                <a:solidFill>
+                  <a:schemeClr val="tx1"/>
+                </a:solidFill>
+              </a:rPr>
+              <a:t>A Quarto report with all code</a:t>
+            </a:r>
+          </a:p>
+          <a:p>
+            <a:pPr algn="l" marL="182880" indent="-182880">
+              <a:spcAft>
+                <a:spcPts val="600"/>
+              </a:spcAft>
+              <a:buClr>
+                <a:schemeClr val="accent1"/>
+              </a:buClr>
+              <a:buFont typeface="Arial"/>
+              <a:buChar char="▪"/>
+            </a:pPr>
+            <a:r>
+              <a:rPr sz="1300" b="0" lang="en-GB">
+                <a:solidFill>
+                  <a:schemeClr val="tx1"/>
+                </a:solidFill>
+              </a:rPr>
+              <a:t>Groups of at most 4</a:t>
+            </a:r>
+          </a:p>
+          <a:p>
+            <a:pPr algn="l" marL="182880" indent="-182880">
+              <a:spcAft>
+                <a:spcPts val="600"/>
+              </a:spcAft>
+              <a:buClr>
+                <a:schemeClr val="accent1"/>
+              </a:buClr>
+              <a:buFont typeface="Arial"/>
+              <a:buChar char="▪"/>
+            </a:pPr>
+            <a:r>
+              <a:rPr sz="1300" b="0" lang="en-GB">
+                <a:solidFill>
+                  <a:schemeClr val="tx1"/>
+                </a:solidFill>
+              </a:rPr>
+              <a:t>30 % of the grade</a:t>
+            </a:r>
+          </a:p>
+        </p:txBody>
+      </p:sp>
+      <p:sp>
+        <p:nvSpPr>
+          <p:cNvPr id="29" name="Case rule box"/>
+          <p:cNvSpPr/>
+          <p:nvPr/>
+        </p:nvSpPr>
+        <p:spPr>
+          <a:xfrm>
+            <a:off x="457200" y="4005072"/>
+            <a:ext cx="8229600" cy="685800"/>
+          </a:xfrm>
+          <a:prstGeom prst="rect">
             <a:avLst/>
           </a:prstGeom>
           <a:solidFill>
@@ -44195,31 +44373,45 @@
           </a:fontRef>
         </p:style>
         <p:txBody>
-          <a:bodyPr rtlCol="0" anchor="ctr" lIns="0" rIns="0" tIns="0" bIns="0"/>
-          <a:lstStyle/>
-          <a:p>
-            <a:pPr algn="ctr"/>
-            <a:r>
-              <a:rPr sz="1200" b="1" lang="en-GB">
-                <a:solidFill>
-                  <a:schemeClr val="bg1"/>
-                </a:solidFill>
-              </a:rPr>
-              <a:t>1</a:t>
-            </a:r>
-          </a:p>
-        </p:txBody>
-      </p:sp>
-      <p:sp>
-        <p:nvSpPr>
-          <p:cNvPr id="12" name="Takeaways text 1"/>
+          <a:bodyPr rtlCol="0" anchor="ctr"/>
+          <a:lstStyle/>
+          <a:p/>
+        </p:txBody>
+      </p:sp>
+      <p:pic>
+        <p:nvPicPr>
+          <p:cNvPr id="30" name="Icon Case rule" descr=""/>
+          <p:cNvPicPr>
+            <a:picLocks noChangeAspect="1"/>
+          </p:cNvPicPr>
+          <p:nvPr/>
+        </p:nvPicPr>
+        <p:blipFill>
+          <a:blip r:embed="rId6"/>
+          <a:stretch>
+            <a:fillRect/>
+          </a:stretch>
+        </p:blipFill>
+        <p:spPr>
+          <a:xfrm>
+            <a:off x="658368" y="4165092"/>
+            <a:ext cx="365760" cy="365760"/>
+          </a:xfrm>
+          <a:prstGeom prst="rect">
+            <a:avLst/>
+          </a:prstGeom>
+        </p:spPr>
+      </p:pic>
+      <p:sp>
+        <p:nvSpPr>
+          <p:cNvPr id="31" name="Case rule text"/>
           <p:cNvSpPr txBox="1"/>
           <p:nvPr/>
         </p:nvSpPr>
         <p:spPr>
           <a:xfrm>
-            <a:off x="1051560" y="1234440"/>
-            <a:ext cx="7498080" cy="585216"/>
+            <a:off x="1207008" y="4005072"/>
+            <a:ext cx="7315200" cy="685800"/>
           </a:xfrm>
           <a:prstGeom prst="rect">
             <a:avLst/>
@@ -44240,126 +44432,32 @@
             <a:r>
               <a:rPr sz="1200" b="1" lang="en-GB">
                 <a:solidFill>
-                  <a:schemeClr val="tx2"/>
-                </a:solidFill>
-              </a:rPr>
-              <a:t>MMM </a:t>
+                  <a:schemeClr val="bg1"/>
+                </a:solidFill>
+              </a:rPr>
+              <a:t>Every number from code: </a:t>
             </a:r>
             <a:r>
               <a:rPr sz="1200" b="0" lang="en-GB">
                 <a:solidFill>
-                  <a:schemeClr val="tx1"/>
-                </a:solidFill>
-              </a:rPr>
-              <a:t>explains weekly sales with marketing and other drivers and splits them into base and incremental</a:t>
-            </a:r>
-          </a:p>
-        </p:txBody>
-      </p:sp>
-      <p:sp>
-        <p:nvSpPr>
-          <p:cNvPr id="13" name="Takeaways row 2"/>
-          <p:cNvSpPr/>
-          <p:nvPr/>
-        </p:nvSpPr>
-        <p:spPr>
-          <a:xfrm>
-            <a:off x="457200" y="1901952"/>
-            <a:ext cx="8229600" cy="585216"/>
-          </a:xfrm>
-          <a:prstGeom prst="rect">
-            <a:avLst/>
-          </a:prstGeom>
-          <a:solidFill>
-            <a:schemeClr val="bg2"/>
-          </a:solidFill>
-          <a:ln>
-            <a:noFill/>
-          </a:ln>
-          <a:effectLst/>
-        </p:spPr>
-        <p:style>
-          <a:lnRef idx="1">
-            <a:schemeClr val="accent1"/>
-          </a:lnRef>
-          <a:fillRef idx="3">
-            <a:schemeClr val="accent1"/>
-          </a:fillRef>
-          <a:effectRef idx="2">
-            <a:schemeClr val="accent1"/>
-          </a:effectRef>
-          <a:fontRef idx="minor">
-            <a:schemeClr val="lt1"/>
-          </a:fontRef>
-        </p:style>
-        <p:txBody>
-          <a:bodyPr rtlCol="0" anchor="ctr"/>
-          <a:lstStyle/>
-          <a:p/>
-        </p:txBody>
-      </p:sp>
-      <p:sp>
-        <p:nvSpPr>
-          <p:cNvPr id="14" name="Takeaways number 2"/>
-          <p:cNvSpPr/>
-          <p:nvPr/>
-        </p:nvSpPr>
-        <p:spPr>
-          <a:xfrm>
-            <a:off x="594360" y="2039112"/>
-            <a:ext cx="310896" cy="310896"/>
-          </a:xfrm>
-          <a:prstGeom prst="ellipse">
-            <a:avLst/>
-          </a:prstGeom>
-          <a:solidFill>
-            <a:schemeClr val="tx2"/>
-          </a:solidFill>
-          <a:ln>
-            <a:noFill/>
-          </a:ln>
-          <a:effectLst/>
-        </p:spPr>
-        <p:style>
-          <a:lnRef idx="1">
-            <a:schemeClr val="accent1"/>
-          </a:lnRef>
-          <a:fillRef idx="3">
-            <a:schemeClr val="accent1"/>
-          </a:fillRef>
-          <a:effectRef idx="2">
-            <a:schemeClr val="accent1"/>
-          </a:effectRef>
-          <a:fontRef idx="minor">
-            <a:schemeClr val="lt1"/>
-          </a:fontRef>
-        </p:style>
-        <p:txBody>
-          <a:bodyPr rtlCol="0" anchor="ctr" lIns="0" rIns="0" tIns="0" bIns="0"/>
-          <a:lstStyle/>
-          <a:p>
-            <a:pPr algn="ctr"/>
-            <a:r>
-              <a:rPr sz="1200" b="1" lang="en-GB">
-                <a:solidFill>
                   <a:schemeClr val="bg1"/>
                 </a:solidFill>
               </a:rPr>
-              <a:t>2</a:t>
-            </a:r>
-          </a:p>
-        </p:txBody>
-      </p:sp>
-      <p:sp>
-        <p:nvSpPr>
-          <p:cNvPr id="15" name="Takeaways text 2"/>
+              <a:t>the report renders from a fresh copy of your project folder.</a:t>
+            </a:r>
+          </a:p>
+        </p:txBody>
+      </p:sp>
+      <p:sp>
+        <p:nvSpPr>
+          <p:cNvPr id="32" name="Case where"/>
           <p:cNvSpPr txBox="1"/>
           <p:nvPr/>
         </p:nvSpPr>
         <p:spPr>
           <a:xfrm>
-            <a:off x="1051560" y="1901952"/>
-            <a:ext cx="7498080" cy="585216"/>
+            <a:off x="457200" y="4754880"/>
+            <a:ext cx="8229600" cy="292608"/>
           </a:xfrm>
           <a:prstGeom prst="rect">
             <a:avLst/>
@@ -44383,547 +44481,16 @@
                   <a:schemeClr val="tx2"/>
                 </a:solidFill>
               </a:rPr>
-              <a:t>Adstock and saturation </a:t>
+              <a:t>Brief, data and assessment criteria: </a:t>
             </a:r>
             <a:r>
               <a:rPr sz="1200" b="0" lang="en-GB">
                 <a:solidFill>
-                  <a:schemeClr val="tx1"/>
-                </a:solidFill>
-              </a:rPr>
-              <a:t>capture carryover and diminishing returns; decide on marginal, not average, ROAS</a:t>
-            </a:r>
-          </a:p>
-        </p:txBody>
-      </p:sp>
-      <p:sp>
-        <p:nvSpPr>
-          <p:cNvPr id="16" name="Takeaways row 3"/>
-          <p:cNvSpPr/>
-          <p:nvPr/>
-        </p:nvSpPr>
-        <p:spPr>
-          <a:xfrm>
-            <a:off x="457200" y="2569464"/>
-            <a:ext cx="8229600" cy="585216"/>
-          </a:xfrm>
-          <a:prstGeom prst="rect">
-            <a:avLst/>
-          </a:prstGeom>
-          <a:solidFill>
-            <a:schemeClr val="bg2"/>
-          </a:solidFill>
-          <a:ln>
-            <a:noFill/>
-          </a:ln>
-          <a:effectLst/>
-        </p:spPr>
-        <p:style>
-          <a:lnRef idx="1">
-            <a:schemeClr val="accent1"/>
-          </a:lnRef>
-          <a:fillRef idx="3">
-            <a:schemeClr val="accent1"/>
-          </a:fillRef>
-          <a:effectRef idx="2">
-            <a:schemeClr val="accent1"/>
-          </a:effectRef>
-          <a:fontRef idx="minor">
-            <a:schemeClr val="lt1"/>
-          </a:fontRef>
-        </p:style>
-        <p:txBody>
-          <a:bodyPr rtlCol="0" anchor="ctr"/>
-          <a:lstStyle/>
-          <a:p/>
-        </p:txBody>
-      </p:sp>
-      <p:sp>
-        <p:nvSpPr>
-          <p:cNvPr id="17" name="Takeaways number 3"/>
-          <p:cNvSpPr/>
-          <p:nvPr/>
-        </p:nvSpPr>
-        <p:spPr>
-          <a:xfrm>
-            <a:off x="594360" y="2706624"/>
-            <a:ext cx="310896" cy="310896"/>
-          </a:xfrm>
-          <a:prstGeom prst="ellipse">
-            <a:avLst/>
-          </a:prstGeom>
-          <a:solidFill>
-            <a:schemeClr val="tx2"/>
-          </a:solidFill>
-          <a:ln>
-            <a:noFill/>
-          </a:ln>
-          <a:effectLst/>
-        </p:spPr>
-        <p:style>
-          <a:lnRef idx="1">
-            <a:schemeClr val="accent1"/>
-          </a:lnRef>
-          <a:fillRef idx="3">
-            <a:schemeClr val="accent1"/>
-          </a:fillRef>
-          <a:effectRef idx="2">
-            <a:schemeClr val="accent1"/>
-          </a:effectRef>
-          <a:fontRef idx="minor">
-            <a:schemeClr val="lt1"/>
-          </a:fontRef>
-        </p:style>
-        <p:txBody>
-          <a:bodyPr rtlCol="0" anchor="ctr" lIns="0" rIns="0" tIns="0" bIns="0"/>
-          <a:lstStyle/>
-          <a:p>
-            <a:pPr algn="ctr"/>
-            <a:r>
-              <a:rPr sz="1200" b="1" lang="en-GB">
-                <a:solidFill>
-                  <a:schemeClr val="bg1"/>
-                </a:solidFill>
-              </a:rPr>
-              <a:t>3</a:t>
-            </a:r>
-          </a:p>
-        </p:txBody>
-      </p:sp>
-      <p:sp>
-        <p:nvSpPr>
-          <p:cNvPr id="18" name="Takeaways text 3"/>
-          <p:cNvSpPr txBox="1"/>
-          <p:nvPr/>
-        </p:nvSpPr>
-        <p:spPr>
-          <a:xfrm>
-            <a:off x="1051560" y="2569464"/>
-            <a:ext cx="7498080" cy="585216"/>
-          </a:xfrm>
-          <a:prstGeom prst="rect">
-            <a:avLst/>
-          </a:prstGeom>
-          <a:noFill/>
-        </p:spPr>
-        <p:txBody>
-          <a:bodyPr wrap="square" lIns="0" rIns="0" tIns="0" bIns="0" anchor="ctr">
-            <a:noAutofit/>
-          </a:bodyPr>
-          <a:lstStyle/>
-          <a:p>
-            <a:pPr algn="l">
-              <a:spcAft>
-                <a:spcPts val="400"/>
-              </a:spcAft>
-            </a:pPr>
-            <a:r>
-              <a:rPr sz="1200" b="1" lang="en-GB">
-                <a:solidFill>
                   <a:schemeClr val="tx2"/>
                 </a:solidFill>
-              </a:rPr>
-              <a:t>Benchmarks: </a:t>
-            </a:r>
-            <a:r>
-              <a:rPr sz="1200" b="0" lang="en-GB">
-                <a:solidFill>
-                  <a:schemeClr val="tx1"/>
-                </a:solidFill>
-              </a:rPr>
-              <a:t>advertising elasticities around 0.1 short term, larger price effects, differences by country</a:t>
-            </a:r>
-          </a:p>
-        </p:txBody>
-      </p:sp>
-      <p:sp>
-        <p:nvSpPr>
-          <p:cNvPr id="19" name="Takeaways row 4"/>
-          <p:cNvSpPr/>
-          <p:nvPr/>
-        </p:nvSpPr>
-        <p:spPr>
-          <a:xfrm>
-            <a:off x="457200" y="3236976"/>
-            <a:ext cx="8229600" cy="585216"/>
-          </a:xfrm>
-          <a:prstGeom prst="rect">
-            <a:avLst/>
-          </a:prstGeom>
-          <a:solidFill>
-            <a:schemeClr val="bg2"/>
-          </a:solidFill>
-          <a:ln>
-            <a:noFill/>
-          </a:ln>
-          <a:effectLst/>
-        </p:spPr>
-        <p:style>
-          <a:lnRef idx="1">
-            <a:schemeClr val="accent1"/>
-          </a:lnRef>
-          <a:fillRef idx="3">
-            <a:schemeClr val="accent1"/>
-          </a:fillRef>
-          <a:effectRef idx="2">
-            <a:schemeClr val="accent1"/>
-          </a:effectRef>
-          <a:fontRef idx="minor">
-            <a:schemeClr val="lt1"/>
-          </a:fontRef>
-        </p:style>
-        <p:txBody>
-          <a:bodyPr rtlCol="0" anchor="ctr"/>
-          <a:lstStyle/>
-          <a:p/>
-        </p:txBody>
-      </p:sp>
-      <p:sp>
-        <p:nvSpPr>
-          <p:cNvPr id="20" name="Takeaways number 4"/>
-          <p:cNvSpPr/>
-          <p:nvPr/>
-        </p:nvSpPr>
-        <p:spPr>
-          <a:xfrm>
-            <a:off x="594360" y="3374136"/>
-            <a:ext cx="310896" cy="310896"/>
-          </a:xfrm>
-          <a:prstGeom prst="ellipse">
-            <a:avLst/>
-          </a:prstGeom>
-          <a:solidFill>
-            <a:schemeClr val="tx2"/>
-          </a:solidFill>
-          <a:ln>
-            <a:noFill/>
-          </a:ln>
-          <a:effectLst/>
-        </p:spPr>
-        <p:style>
-          <a:lnRef idx="1">
-            <a:schemeClr val="accent1"/>
-          </a:lnRef>
-          <a:fillRef idx="3">
-            <a:schemeClr val="accent1"/>
-          </a:fillRef>
-          <a:effectRef idx="2">
-            <a:schemeClr val="accent1"/>
-          </a:effectRef>
-          <a:fontRef idx="minor">
-            <a:schemeClr val="lt1"/>
-          </a:fontRef>
-        </p:style>
-        <p:txBody>
-          <a:bodyPr rtlCol="0" anchor="ctr" lIns="0" rIns="0" tIns="0" bIns="0"/>
-          <a:lstStyle/>
-          <a:p>
-            <a:pPr algn="ctr"/>
-            <a:r>
-              <a:rPr sz="1200" b="1" lang="en-GB">
-                <a:solidFill>
-                  <a:schemeClr val="bg1"/>
-                </a:solidFill>
-              </a:rPr>
-              <a:t>4</a:t>
-            </a:r>
-          </a:p>
-        </p:txBody>
-      </p:sp>
-      <p:sp>
-        <p:nvSpPr>
-          <p:cNvPr id="21" name="Takeaways text 4"/>
-          <p:cNvSpPr txBox="1"/>
-          <p:nvPr/>
-        </p:nvSpPr>
-        <p:spPr>
-          <a:xfrm>
-            <a:off x="1051560" y="3236976"/>
-            <a:ext cx="7498080" cy="585216"/>
-          </a:xfrm>
-          <a:prstGeom prst="rect">
-            <a:avLst/>
-          </a:prstGeom>
-          <a:noFill/>
-        </p:spPr>
-        <p:txBody>
-          <a:bodyPr wrap="square" lIns="0" rIns="0" tIns="0" bIns="0" anchor="ctr">
-            <a:noAutofit/>
-          </a:bodyPr>
-          <a:lstStyle/>
-          <a:p>
-            <a:pPr algn="l">
-              <a:spcAft>
-                <a:spcPts val="400"/>
-              </a:spcAft>
-            </a:pPr>
-            <a:r>
-              <a:rPr sz="1200" b="1" lang="en-GB">
-                <a:solidFill>
-                  <a:schemeClr val="tx2"/>
-                </a:solidFill>
-              </a:rPr>
-              <a:t>Clicks are not causes: </a:t>
-            </a:r>
-            <a:r>
-              <a:rPr sz="1200" b="0" lang="en-GB">
-                <a:solidFill>
-                  <a:schemeClr val="tx1"/>
-                </a:solidFill>
-              </a:rPr>
-              <a:t>attribution shares out sales; validate MMM on a holdout and calibrate it with experiments</a:t>
-            </a:r>
-          </a:p>
-        </p:txBody>
-      </p:sp>
-      <p:sp>
-        <p:nvSpPr>
-          <p:cNvPr id="22" name="Takeaways row 5"/>
-          <p:cNvSpPr/>
-          <p:nvPr/>
-        </p:nvSpPr>
-        <p:spPr>
-          <a:xfrm>
-            <a:off x="457200" y="3904488"/>
-            <a:ext cx="8229600" cy="585216"/>
-          </a:xfrm>
-          <a:prstGeom prst="rect">
-            <a:avLst/>
-          </a:prstGeom>
-          <a:solidFill>
-            <a:schemeClr val="bg2"/>
-          </a:solidFill>
-          <a:ln>
-            <a:noFill/>
-          </a:ln>
-          <a:effectLst/>
-        </p:spPr>
-        <p:style>
-          <a:lnRef idx="1">
-            <a:schemeClr val="accent1"/>
-          </a:lnRef>
-          <a:fillRef idx="3">
-            <a:schemeClr val="accent1"/>
-          </a:fillRef>
-          <a:effectRef idx="2">
-            <a:schemeClr val="accent1"/>
-          </a:effectRef>
-          <a:fontRef idx="minor">
-            <a:schemeClr val="lt1"/>
-          </a:fontRef>
-        </p:style>
-        <p:txBody>
-          <a:bodyPr rtlCol="0" anchor="ctr"/>
-          <a:lstStyle/>
-          <a:p/>
-        </p:txBody>
-      </p:sp>
-      <p:sp>
-        <p:nvSpPr>
-          <p:cNvPr id="23" name="Takeaways number 5"/>
-          <p:cNvSpPr/>
-          <p:nvPr/>
-        </p:nvSpPr>
-        <p:spPr>
-          <a:xfrm>
-            <a:off x="594360" y="4041648"/>
-            <a:ext cx="310896" cy="310896"/>
-          </a:xfrm>
-          <a:prstGeom prst="ellipse">
-            <a:avLst/>
-          </a:prstGeom>
-          <a:solidFill>
-            <a:schemeClr val="tx2"/>
-          </a:solidFill>
-          <a:ln>
-            <a:noFill/>
-          </a:ln>
-          <a:effectLst/>
-        </p:spPr>
-        <p:style>
-          <a:lnRef idx="1">
-            <a:schemeClr val="accent1"/>
-          </a:lnRef>
-          <a:fillRef idx="3">
-            <a:schemeClr val="accent1"/>
-          </a:fillRef>
-          <a:effectRef idx="2">
-            <a:schemeClr val="accent1"/>
-          </a:effectRef>
-          <a:fontRef idx="minor">
-            <a:schemeClr val="lt1"/>
-          </a:fontRef>
-        </p:style>
-        <p:txBody>
-          <a:bodyPr rtlCol="0" anchor="ctr" lIns="0" rIns="0" tIns="0" bIns="0"/>
-          <a:lstStyle/>
-          <a:p>
-            <a:pPr algn="ctr"/>
-            <a:r>
-              <a:rPr sz="1200" b="1" lang="en-GB">
-                <a:solidFill>
-                  <a:schemeClr val="bg1"/>
-                </a:solidFill>
-              </a:rPr>
-              <a:t>5</a:t>
-            </a:r>
-          </a:p>
-        </p:txBody>
-      </p:sp>
-      <p:sp>
-        <p:nvSpPr>
-          <p:cNvPr id="24" name="Takeaways text 5"/>
-          <p:cNvSpPr txBox="1"/>
-          <p:nvPr/>
-        </p:nvSpPr>
-        <p:spPr>
-          <a:xfrm>
-            <a:off x="1051560" y="3904488"/>
-            <a:ext cx="7498080" cy="585216"/>
-          </a:xfrm>
-          <a:prstGeom prst="rect">
-            <a:avLst/>
-          </a:prstGeom>
-          <a:noFill/>
-        </p:spPr>
-        <p:txBody>
-          <a:bodyPr wrap="square" lIns="0" rIns="0" tIns="0" bIns="0" anchor="ctr">
-            <a:noAutofit/>
-          </a:bodyPr>
-          <a:lstStyle/>
-          <a:p>
-            <a:pPr algn="l">
-              <a:spcAft>
-                <a:spcPts val="400"/>
-              </a:spcAft>
-            </a:pPr>
-            <a:r>
-              <a:rPr sz="1200" b="1" lang="en-GB">
-                <a:solidFill>
-                  <a:schemeClr val="tx2"/>
-                </a:solidFill>
-              </a:rPr>
-              <a:t>Open-source Bayesian tools </a:t>
-            </a:r>
-            <a:r>
-              <a:rPr sz="1200" b="0" lang="en-GB">
-                <a:solidFill>
-                  <a:schemeClr val="tx1"/>
-                </a:solidFill>
-              </a:rPr>
-              <a:t>make it doable in Python: you will build one</a:t>
-            </a:r>
-          </a:p>
-        </p:txBody>
-      </p:sp>
-      <p:sp>
-        <p:nvSpPr>
-          <p:cNvPr id="25" name="Final question box"/>
-          <p:cNvSpPr/>
-          <p:nvPr/>
-        </p:nvSpPr>
-        <p:spPr>
-          <a:xfrm>
-            <a:off x="457200" y="4572000"/>
-            <a:ext cx="8229600" cy="502920"/>
-          </a:xfrm>
-          <a:prstGeom prst="rect">
-            <a:avLst/>
-          </a:prstGeom>
-          <a:solidFill>
-            <a:schemeClr val="tx2"/>
-          </a:solidFill>
-          <a:ln>
-            <a:noFill/>
-          </a:ln>
-          <a:effectLst/>
-        </p:spPr>
-        <p:style>
-          <a:lnRef idx="1">
-            <a:schemeClr val="accent1"/>
-          </a:lnRef>
-          <a:fillRef idx="3">
-            <a:schemeClr val="accent1"/>
-          </a:fillRef>
-          <a:effectRef idx="2">
-            <a:schemeClr val="accent1"/>
-          </a:effectRef>
-          <a:fontRef idx="minor">
-            <a:schemeClr val="lt1"/>
-          </a:fontRef>
-        </p:style>
-        <p:txBody>
-          <a:bodyPr rtlCol="0" anchor="ctr"/>
-          <a:lstStyle/>
-          <a:p/>
-        </p:txBody>
-      </p:sp>
-      <p:pic>
-        <p:nvPicPr>
-          <p:cNvPr id="26" name="Icon Final question" descr=""/>
-          <p:cNvPicPr>
-            <a:picLocks noChangeAspect="1"/>
-          </p:cNvPicPr>
-          <p:nvPr/>
-        </p:nvPicPr>
-        <p:blipFill>
-          <a:blip r:embed="rId3"/>
-          <a:stretch>
-            <a:fillRect/>
-          </a:stretch>
-        </p:blipFill>
-        <p:spPr>
-          <a:xfrm>
-            <a:off x="658368" y="4640580"/>
-            <a:ext cx="365760" cy="365760"/>
-          </a:xfrm>
-          <a:prstGeom prst="rect">
-            <a:avLst/>
-          </a:prstGeom>
-        </p:spPr>
-      </p:pic>
-      <p:sp>
-        <p:nvSpPr>
-          <p:cNvPr id="27" name="Final question text"/>
-          <p:cNvSpPr txBox="1"/>
-          <p:nvPr/>
-        </p:nvSpPr>
-        <p:spPr>
-          <a:xfrm>
-            <a:off x="1207008" y="4572000"/>
-            <a:ext cx="7315200" cy="502920"/>
-          </a:xfrm>
-          <a:prstGeom prst="rect">
-            <a:avLst/>
-          </a:prstGeom>
-          <a:noFill/>
-        </p:spPr>
-        <p:txBody>
-          <a:bodyPr wrap="square" lIns="0" rIns="0" tIns="0" bIns="0" anchor="ctr">
-            <a:noAutofit/>
-          </a:bodyPr>
-          <a:lstStyle/>
-          <a:p>
-            <a:pPr algn="l">
-              <a:spcAft>
-                <a:spcPts val="400"/>
-              </a:spcAft>
-            </a:pPr>
-            <a:r>
-              <a:rPr sz="1200" b="1" lang="en-GB">
-                <a:solidFill>
-                  <a:schemeClr val="bg1"/>
-                </a:solidFill>
-              </a:rPr>
-              <a:t>The question stays the same: </a:t>
-            </a:r>
-            <a:r>
-              <a:rPr sz="1200" b="0" lang="en-GB">
-                <a:solidFill>
-                  <a:schemeClr val="bg1"/>
-                </a:solidFill>
-              </a:rPr>
-              <a:t>where should the next euro go?</a:t>
+                <a:latin typeface="Consolas"/>
+              </a:rPr>
+              <a:t>assignments/group-project/ and Canvas</a:t>
             </a:r>
           </a:p>
         </p:txBody>
@@ -44963,7 +44530,7 @@
           <a:p>
             <a:r>
               <a:rPr sz="1600" lang="en-GB"/>
-              <a:t>Further reading</a:t>
+              <a:t>Key takeaways</a:t>
             </a:r>
           </a:p>
         </p:txBody>
@@ -45019,20 +44586,20 @@
       </p:sp>
       <p:sp>
         <p:nvSpPr>
-          <p:cNvPr id="10" name="Reading 1 header"/>
+          <p:cNvPr id="10" name="Takeaways row 1"/>
           <p:cNvSpPr/>
           <p:nvPr/>
         </p:nvSpPr>
         <p:spPr>
           <a:xfrm>
             <a:off x="457200" y="1234440"/>
-            <a:ext cx="4046220" cy="411480"/>
+            <a:ext cx="8229600" cy="585216"/>
           </a:xfrm>
           <a:prstGeom prst="rect">
             <a:avLst/>
           </a:prstGeom>
           <a:solidFill>
-            <a:schemeClr val="accent1"/>
+            <a:schemeClr val="bg2"/>
           </a:solidFill>
           <a:ln>
             <a:noFill/>
@@ -45061,14 +44628,66 @@
       </p:sp>
       <p:sp>
         <p:nvSpPr>
-          <p:cNvPr id="11" name="Reading 1 heading"/>
+          <p:cNvPr id="11" name="Takeaways number 1"/>
+          <p:cNvSpPr/>
+          <p:nvPr/>
+        </p:nvSpPr>
+        <p:spPr>
+          <a:xfrm>
+            <a:off x="594360" y="1371600"/>
+            <a:ext cx="310896" cy="310896"/>
+          </a:xfrm>
+          <a:prstGeom prst="ellipse">
+            <a:avLst/>
+          </a:prstGeom>
+          <a:solidFill>
+            <a:schemeClr val="tx2"/>
+          </a:solidFill>
+          <a:ln>
+            <a:noFill/>
+          </a:ln>
+          <a:effectLst/>
+        </p:spPr>
+        <p:style>
+          <a:lnRef idx="1">
+            <a:schemeClr val="accent1"/>
+          </a:lnRef>
+          <a:fillRef idx="3">
+            <a:schemeClr val="accent1"/>
+          </a:fillRef>
+          <a:effectRef idx="2">
+            <a:schemeClr val="accent1"/>
+          </a:effectRef>
+          <a:fontRef idx="minor">
+            <a:schemeClr val="lt1"/>
+          </a:fontRef>
+        </p:style>
+        <p:txBody>
+          <a:bodyPr rtlCol="0" anchor="ctr" lIns="0" rIns="0" tIns="0" bIns="0"/>
+          <a:lstStyle/>
+          <a:p>
+            <a:pPr algn="ctr"/>
+            <a:r>
+              <a:rPr sz="1200" b="1" lang="en-GB">
+                <a:solidFill>
+                  <a:schemeClr val="bg1"/>
+                </a:solidFill>
+              </a:rPr>
+              <a:t>1</a:t>
+            </a:r>
+          </a:p>
+        </p:txBody>
+      </p:sp>
+      <p:sp>
+        <p:nvSpPr>
+          <p:cNvPr id="12" name="Takeaways text 1"/>
           <p:cNvSpPr txBox="1"/>
           <p:nvPr/>
         </p:nvSpPr>
         <p:spPr>
           <a:xfrm>
-            <a:off x="594360" y="1234440"/>
-            <a:ext cx="3360420" cy="411480"/>
+            <a:off x="1051560" y="1234440"/>
+            <a:ext cx="7498080" cy="585216"/>
           </a:xfrm>
           <a:prstGeom prst="rect">
             <a:avLst/>
@@ -45087,20 +44706,629 @@
               </a:spcAft>
             </a:pPr>
             <a:r>
-              <a:rPr sz="1500" b="1" lang="en-GB">
+              <a:rPr sz="1200" b="1" lang="en-GB">
+                <a:solidFill>
+                  <a:schemeClr val="tx2"/>
+                </a:solidFill>
+              </a:rPr>
+              <a:t>MMM </a:t>
+            </a:r>
+            <a:r>
+              <a:rPr sz="1200" b="0" lang="en-GB">
+                <a:solidFill>
+                  <a:schemeClr val="tx1"/>
+                </a:solidFill>
+              </a:rPr>
+              <a:t>explains weekly sales with marketing and other drivers and splits them into base and incremental</a:t>
+            </a:r>
+          </a:p>
+        </p:txBody>
+      </p:sp>
+      <p:sp>
+        <p:nvSpPr>
+          <p:cNvPr id="13" name="Takeaways row 2"/>
+          <p:cNvSpPr/>
+          <p:nvPr/>
+        </p:nvSpPr>
+        <p:spPr>
+          <a:xfrm>
+            <a:off x="457200" y="1901952"/>
+            <a:ext cx="8229600" cy="585216"/>
+          </a:xfrm>
+          <a:prstGeom prst="rect">
+            <a:avLst/>
+          </a:prstGeom>
+          <a:solidFill>
+            <a:schemeClr val="bg2"/>
+          </a:solidFill>
+          <a:ln>
+            <a:noFill/>
+          </a:ln>
+          <a:effectLst/>
+        </p:spPr>
+        <p:style>
+          <a:lnRef idx="1">
+            <a:schemeClr val="accent1"/>
+          </a:lnRef>
+          <a:fillRef idx="3">
+            <a:schemeClr val="accent1"/>
+          </a:fillRef>
+          <a:effectRef idx="2">
+            <a:schemeClr val="accent1"/>
+          </a:effectRef>
+          <a:fontRef idx="minor">
+            <a:schemeClr val="lt1"/>
+          </a:fontRef>
+        </p:style>
+        <p:txBody>
+          <a:bodyPr rtlCol="0" anchor="ctr"/>
+          <a:lstStyle/>
+          <a:p/>
+        </p:txBody>
+      </p:sp>
+      <p:sp>
+        <p:nvSpPr>
+          <p:cNvPr id="14" name="Takeaways number 2"/>
+          <p:cNvSpPr/>
+          <p:nvPr/>
+        </p:nvSpPr>
+        <p:spPr>
+          <a:xfrm>
+            <a:off x="594360" y="2039112"/>
+            <a:ext cx="310896" cy="310896"/>
+          </a:xfrm>
+          <a:prstGeom prst="ellipse">
+            <a:avLst/>
+          </a:prstGeom>
+          <a:solidFill>
+            <a:schemeClr val="tx2"/>
+          </a:solidFill>
+          <a:ln>
+            <a:noFill/>
+          </a:ln>
+          <a:effectLst/>
+        </p:spPr>
+        <p:style>
+          <a:lnRef idx="1">
+            <a:schemeClr val="accent1"/>
+          </a:lnRef>
+          <a:fillRef idx="3">
+            <a:schemeClr val="accent1"/>
+          </a:fillRef>
+          <a:effectRef idx="2">
+            <a:schemeClr val="accent1"/>
+          </a:effectRef>
+          <a:fontRef idx="minor">
+            <a:schemeClr val="lt1"/>
+          </a:fontRef>
+        </p:style>
+        <p:txBody>
+          <a:bodyPr rtlCol="0" anchor="ctr" lIns="0" rIns="0" tIns="0" bIns="0"/>
+          <a:lstStyle/>
+          <a:p>
+            <a:pPr algn="ctr"/>
+            <a:r>
+              <a:rPr sz="1200" b="1" lang="en-GB">
                 <a:solidFill>
                   <a:schemeClr val="bg1"/>
                 </a:solidFill>
-                <a:latin typeface="+mj-lt"/>
-              </a:rPr>
-              <a:t>Foundations and evidence</a:t>
-            </a:r>
-          </a:p>
+              </a:rPr>
+              <a:t>2</a:t>
+            </a:r>
+          </a:p>
+        </p:txBody>
+      </p:sp>
+      <p:sp>
+        <p:nvSpPr>
+          <p:cNvPr id="15" name="Takeaways text 2"/>
+          <p:cNvSpPr txBox="1"/>
+          <p:nvPr/>
+        </p:nvSpPr>
+        <p:spPr>
+          <a:xfrm>
+            <a:off x="1051560" y="1901952"/>
+            <a:ext cx="7498080" cy="585216"/>
+          </a:xfrm>
+          <a:prstGeom prst="rect">
+            <a:avLst/>
+          </a:prstGeom>
+          <a:noFill/>
+        </p:spPr>
+        <p:txBody>
+          <a:bodyPr wrap="square" lIns="0" rIns="0" tIns="0" bIns="0" anchor="ctr">
+            <a:noAutofit/>
+          </a:bodyPr>
+          <a:lstStyle/>
+          <a:p>
+            <a:pPr algn="l">
+              <a:spcAft>
+                <a:spcPts val="400"/>
+              </a:spcAft>
+            </a:pPr>
+            <a:r>
+              <a:rPr sz="1200" b="1" lang="en-GB">
+                <a:solidFill>
+                  <a:schemeClr val="tx2"/>
+                </a:solidFill>
+              </a:rPr>
+              <a:t>Adstock and saturation </a:t>
+            </a:r>
+            <a:r>
+              <a:rPr sz="1200" b="0" lang="en-GB">
+                <a:solidFill>
+                  <a:schemeClr val="tx1"/>
+                </a:solidFill>
+              </a:rPr>
+              <a:t>capture carryover and diminishing returns; decide on marginal, not average, ROAS</a:t>
+            </a:r>
+          </a:p>
+        </p:txBody>
+      </p:sp>
+      <p:sp>
+        <p:nvSpPr>
+          <p:cNvPr id="16" name="Takeaways row 3"/>
+          <p:cNvSpPr/>
+          <p:nvPr/>
+        </p:nvSpPr>
+        <p:spPr>
+          <a:xfrm>
+            <a:off x="457200" y="2569464"/>
+            <a:ext cx="8229600" cy="585216"/>
+          </a:xfrm>
+          <a:prstGeom prst="rect">
+            <a:avLst/>
+          </a:prstGeom>
+          <a:solidFill>
+            <a:schemeClr val="bg2"/>
+          </a:solidFill>
+          <a:ln>
+            <a:noFill/>
+          </a:ln>
+          <a:effectLst/>
+        </p:spPr>
+        <p:style>
+          <a:lnRef idx="1">
+            <a:schemeClr val="accent1"/>
+          </a:lnRef>
+          <a:fillRef idx="3">
+            <a:schemeClr val="accent1"/>
+          </a:fillRef>
+          <a:effectRef idx="2">
+            <a:schemeClr val="accent1"/>
+          </a:effectRef>
+          <a:fontRef idx="minor">
+            <a:schemeClr val="lt1"/>
+          </a:fontRef>
+        </p:style>
+        <p:txBody>
+          <a:bodyPr rtlCol="0" anchor="ctr"/>
+          <a:lstStyle/>
+          <a:p/>
+        </p:txBody>
+      </p:sp>
+      <p:sp>
+        <p:nvSpPr>
+          <p:cNvPr id="17" name="Takeaways number 3"/>
+          <p:cNvSpPr/>
+          <p:nvPr/>
+        </p:nvSpPr>
+        <p:spPr>
+          <a:xfrm>
+            <a:off x="594360" y="2706624"/>
+            <a:ext cx="310896" cy="310896"/>
+          </a:xfrm>
+          <a:prstGeom prst="ellipse">
+            <a:avLst/>
+          </a:prstGeom>
+          <a:solidFill>
+            <a:schemeClr val="tx2"/>
+          </a:solidFill>
+          <a:ln>
+            <a:noFill/>
+          </a:ln>
+          <a:effectLst/>
+        </p:spPr>
+        <p:style>
+          <a:lnRef idx="1">
+            <a:schemeClr val="accent1"/>
+          </a:lnRef>
+          <a:fillRef idx="3">
+            <a:schemeClr val="accent1"/>
+          </a:fillRef>
+          <a:effectRef idx="2">
+            <a:schemeClr val="accent1"/>
+          </a:effectRef>
+          <a:fontRef idx="minor">
+            <a:schemeClr val="lt1"/>
+          </a:fontRef>
+        </p:style>
+        <p:txBody>
+          <a:bodyPr rtlCol="0" anchor="ctr" lIns="0" rIns="0" tIns="0" bIns="0"/>
+          <a:lstStyle/>
+          <a:p>
+            <a:pPr algn="ctr"/>
+            <a:r>
+              <a:rPr sz="1200" b="1" lang="en-GB">
+                <a:solidFill>
+                  <a:schemeClr val="bg1"/>
+                </a:solidFill>
+              </a:rPr>
+              <a:t>3</a:t>
+            </a:r>
+          </a:p>
+        </p:txBody>
+      </p:sp>
+      <p:sp>
+        <p:nvSpPr>
+          <p:cNvPr id="18" name="Takeaways text 3"/>
+          <p:cNvSpPr txBox="1"/>
+          <p:nvPr/>
+        </p:nvSpPr>
+        <p:spPr>
+          <a:xfrm>
+            <a:off x="1051560" y="2569464"/>
+            <a:ext cx="7498080" cy="585216"/>
+          </a:xfrm>
+          <a:prstGeom prst="rect">
+            <a:avLst/>
+          </a:prstGeom>
+          <a:noFill/>
+        </p:spPr>
+        <p:txBody>
+          <a:bodyPr wrap="square" lIns="0" rIns="0" tIns="0" bIns="0" anchor="ctr">
+            <a:noAutofit/>
+          </a:bodyPr>
+          <a:lstStyle/>
+          <a:p>
+            <a:pPr algn="l">
+              <a:spcAft>
+                <a:spcPts val="400"/>
+              </a:spcAft>
+            </a:pPr>
+            <a:r>
+              <a:rPr sz="1200" b="1" lang="en-GB">
+                <a:solidFill>
+                  <a:schemeClr val="tx2"/>
+                </a:solidFill>
+              </a:rPr>
+              <a:t>Benchmarks: </a:t>
+            </a:r>
+            <a:r>
+              <a:rPr sz="1200" b="0" lang="en-GB">
+                <a:solidFill>
+                  <a:schemeClr val="tx1"/>
+                </a:solidFill>
+              </a:rPr>
+              <a:t>advertising elasticities around 0.1 short term, larger price effects, differences by country</a:t>
+            </a:r>
+          </a:p>
+        </p:txBody>
+      </p:sp>
+      <p:sp>
+        <p:nvSpPr>
+          <p:cNvPr id="19" name="Takeaways row 4"/>
+          <p:cNvSpPr/>
+          <p:nvPr/>
+        </p:nvSpPr>
+        <p:spPr>
+          <a:xfrm>
+            <a:off x="457200" y="3236976"/>
+            <a:ext cx="8229600" cy="585216"/>
+          </a:xfrm>
+          <a:prstGeom prst="rect">
+            <a:avLst/>
+          </a:prstGeom>
+          <a:solidFill>
+            <a:schemeClr val="bg2"/>
+          </a:solidFill>
+          <a:ln>
+            <a:noFill/>
+          </a:ln>
+          <a:effectLst/>
+        </p:spPr>
+        <p:style>
+          <a:lnRef idx="1">
+            <a:schemeClr val="accent1"/>
+          </a:lnRef>
+          <a:fillRef idx="3">
+            <a:schemeClr val="accent1"/>
+          </a:fillRef>
+          <a:effectRef idx="2">
+            <a:schemeClr val="accent1"/>
+          </a:effectRef>
+          <a:fontRef idx="minor">
+            <a:schemeClr val="lt1"/>
+          </a:fontRef>
+        </p:style>
+        <p:txBody>
+          <a:bodyPr rtlCol="0" anchor="ctr"/>
+          <a:lstStyle/>
+          <a:p/>
+        </p:txBody>
+      </p:sp>
+      <p:sp>
+        <p:nvSpPr>
+          <p:cNvPr id="20" name="Takeaways number 4"/>
+          <p:cNvSpPr/>
+          <p:nvPr/>
+        </p:nvSpPr>
+        <p:spPr>
+          <a:xfrm>
+            <a:off x="594360" y="3374136"/>
+            <a:ext cx="310896" cy="310896"/>
+          </a:xfrm>
+          <a:prstGeom prst="ellipse">
+            <a:avLst/>
+          </a:prstGeom>
+          <a:solidFill>
+            <a:schemeClr val="tx2"/>
+          </a:solidFill>
+          <a:ln>
+            <a:noFill/>
+          </a:ln>
+          <a:effectLst/>
+        </p:spPr>
+        <p:style>
+          <a:lnRef idx="1">
+            <a:schemeClr val="accent1"/>
+          </a:lnRef>
+          <a:fillRef idx="3">
+            <a:schemeClr val="accent1"/>
+          </a:fillRef>
+          <a:effectRef idx="2">
+            <a:schemeClr val="accent1"/>
+          </a:effectRef>
+          <a:fontRef idx="minor">
+            <a:schemeClr val="lt1"/>
+          </a:fontRef>
+        </p:style>
+        <p:txBody>
+          <a:bodyPr rtlCol="0" anchor="ctr" lIns="0" rIns="0" tIns="0" bIns="0"/>
+          <a:lstStyle/>
+          <a:p>
+            <a:pPr algn="ctr"/>
+            <a:r>
+              <a:rPr sz="1200" b="1" lang="en-GB">
+                <a:solidFill>
+                  <a:schemeClr val="bg1"/>
+                </a:solidFill>
+              </a:rPr>
+              <a:t>4</a:t>
+            </a:r>
+          </a:p>
+        </p:txBody>
+      </p:sp>
+      <p:sp>
+        <p:nvSpPr>
+          <p:cNvPr id="21" name="Takeaways text 4"/>
+          <p:cNvSpPr txBox="1"/>
+          <p:nvPr/>
+        </p:nvSpPr>
+        <p:spPr>
+          <a:xfrm>
+            <a:off x="1051560" y="3236976"/>
+            <a:ext cx="7498080" cy="585216"/>
+          </a:xfrm>
+          <a:prstGeom prst="rect">
+            <a:avLst/>
+          </a:prstGeom>
+          <a:noFill/>
+        </p:spPr>
+        <p:txBody>
+          <a:bodyPr wrap="square" lIns="0" rIns="0" tIns="0" bIns="0" anchor="ctr">
+            <a:noAutofit/>
+          </a:bodyPr>
+          <a:lstStyle/>
+          <a:p>
+            <a:pPr algn="l">
+              <a:spcAft>
+                <a:spcPts val="400"/>
+              </a:spcAft>
+            </a:pPr>
+            <a:r>
+              <a:rPr sz="1200" b="1" lang="en-GB">
+                <a:solidFill>
+                  <a:schemeClr val="tx2"/>
+                </a:solidFill>
+              </a:rPr>
+              <a:t>Clicks are not causes: </a:t>
+            </a:r>
+            <a:r>
+              <a:rPr sz="1200" b="0" lang="en-GB">
+                <a:solidFill>
+                  <a:schemeClr val="tx1"/>
+                </a:solidFill>
+              </a:rPr>
+              <a:t>attribution shares out sales; validate MMM on a holdout and calibrate it with experiments</a:t>
+            </a:r>
+          </a:p>
+        </p:txBody>
+      </p:sp>
+      <p:sp>
+        <p:nvSpPr>
+          <p:cNvPr id="22" name="Takeaways row 5"/>
+          <p:cNvSpPr/>
+          <p:nvPr/>
+        </p:nvSpPr>
+        <p:spPr>
+          <a:xfrm>
+            <a:off x="457200" y="3904488"/>
+            <a:ext cx="8229600" cy="585216"/>
+          </a:xfrm>
+          <a:prstGeom prst="rect">
+            <a:avLst/>
+          </a:prstGeom>
+          <a:solidFill>
+            <a:schemeClr val="bg2"/>
+          </a:solidFill>
+          <a:ln>
+            <a:noFill/>
+          </a:ln>
+          <a:effectLst/>
+        </p:spPr>
+        <p:style>
+          <a:lnRef idx="1">
+            <a:schemeClr val="accent1"/>
+          </a:lnRef>
+          <a:fillRef idx="3">
+            <a:schemeClr val="accent1"/>
+          </a:fillRef>
+          <a:effectRef idx="2">
+            <a:schemeClr val="accent1"/>
+          </a:effectRef>
+          <a:fontRef idx="minor">
+            <a:schemeClr val="lt1"/>
+          </a:fontRef>
+        </p:style>
+        <p:txBody>
+          <a:bodyPr rtlCol="0" anchor="ctr"/>
+          <a:lstStyle/>
+          <a:p/>
+        </p:txBody>
+      </p:sp>
+      <p:sp>
+        <p:nvSpPr>
+          <p:cNvPr id="23" name="Takeaways number 5"/>
+          <p:cNvSpPr/>
+          <p:nvPr/>
+        </p:nvSpPr>
+        <p:spPr>
+          <a:xfrm>
+            <a:off x="594360" y="4041648"/>
+            <a:ext cx="310896" cy="310896"/>
+          </a:xfrm>
+          <a:prstGeom prst="ellipse">
+            <a:avLst/>
+          </a:prstGeom>
+          <a:solidFill>
+            <a:schemeClr val="tx2"/>
+          </a:solidFill>
+          <a:ln>
+            <a:noFill/>
+          </a:ln>
+          <a:effectLst/>
+        </p:spPr>
+        <p:style>
+          <a:lnRef idx="1">
+            <a:schemeClr val="accent1"/>
+          </a:lnRef>
+          <a:fillRef idx="3">
+            <a:schemeClr val="accent1"/>
+          </a:fillRef>
+          <a:effectRef idx="2">
+            <a:schemeClr val="accent1"/>
+          </a:effectRef>
+          <a:fontRef idx="minor">
+            <a:schemeClr val="lt1"/>
+          </a:fontRef>
+        </p:style>
+        <p:txBody>
+          <a:bodyPr rtlCol="0" anchor="ctr" lIns="0" rIns="0" tIns="0" bIns="0"/>
+          <a:lstStyle/>
+          <a:p>
+            <a:pPr algn="ctr"/>
+            <a:r>
+              <a:rPr sz="1200" b="1" lang="en-GB">
+                <a:solidFill>
+                  <a:schemeClr val="bg1"/>
+                </a:solidFill>
+              </a:rPr>
+              <a:t>5</a:t>
+            </a:r>
+          </a:p>
+        </p:txBody>
+      </p:sp>
+      <p:sp>
+        <p:nvSpPr>
+          <p:cNvPr id="24" name="Takeaways text 5"/>
+          <p:cNvSpPr txBox="1"/>
+          <p:nvPr/>
+        </p:nvSpPr>
+        <p:spPr>
+          <a:xfrm>
+            <a:off x="1051560" y="3904488"/>
+            <a:ext cx="7498080" cy="585216"/>
+          </a:xfrm>
+          <a:prstGeom prst="rect">
+            <a:avLst/>
+          </a:prstGeom>
+          <a:noFill/>
+        </p:spPr>
+        <p:txBody>
+          <a:bodyPr wrap="square" lIns="0" rIns="0" tIns="0" bIns="0" anchor="ctr">
+            <a:noAutofit/>
+          </a:bodyPr>
+          <a:lstStyle/>
+          <a:p>
+            <a:pPr algn="l">
+              <a:spcAft>
+                <a:spcPts val="400"/>
+              </a:spcAft>
+            </a:pPr>
+            <a:r>
+              <a:rPr sz="1200" b="1" lang="en-GB">
+                <a:solidFill>
+                  <a:schemeClr val="tx2"/>
+                </a:solidFill>
+              </a:rPr>
+              <a:t>Open-source Bayesian tools </a:t>
+            </a:r>
+            <a:r>
+              <a:rPr sz="1200" b="0" lang="en-GB">
+                <a:solidFill>
+                  <a:schemeClr val="tx1"/>
+                </a:solidFill>
+              </a:rPr>
+              <a:t>make it doable in Python: you will build one</a:t>
+            </a:r>
+          </a:p>
+        </p:txBody>
+      </p:sp>
+      <p:sp>
+        <p:nvSpPr>
+          <p:cNvPr id="25" name="Final question box"/>
+          <p:cNvSpPr/>
+          <p:nvPr/>
+        </p:nvSpPr>
+        <p:spPr>
+          <a:xfrm>
+            <a:off x="457200" y="4572000"/>
+            <a:ext cx="8229600" cy="502920"/>
+          </a:xfrm>
+          <a:prstGeom prst="rect">
+            <a:avLst/>
+          </a:prstGeom>
+          <a:solidFill>
+            <a:schemeClr val="tx2"/>
+          </a:solidFill>
+          <a:ln>
+            <a:noFill/>
+          </a:ln>
+          <a:effectLst/>
+        </p:spPr>
+        <p:style>
+          <a:lnRef idx="1">
+            <a:schemeClr val="accent1"/>
+          </a:lnRef>
+          <a:fillRef idx="3">
+            <a:schemeClr val="accent1"/>
+          </a:fillRef>
+          <a:effectRef idx="2">
+            <a:schemeClr val="accent1"/>
+          </a:effectRef>
+          <a:fontRef idx="minor">
+            <a:schemeClr val="lt1"/>
+          </a:fontRef>
+        </p:style>
+        <p:txBody>
+          <a:bodyPr rtlCol="0" anchor="ctr"/>
+          <a:lstStyle/>
+          <a:p/>
         </p:txBody>
       </p:sp>
       <p:pic>
         <p:nvPicPr>
-          <p:cNvPr id="12" name="Icon reading 1" descr=""/>
+          <p:cNvPr id="26" name="Icon Final question" descr=""/>
           <p:cNvPicPr>
             <a:picLocks noChangeAspect="1"/>
           </p:cNvPicPr>
@@ -45114,8 +45342,8 @@
         </p:blipFill>
         <p:spPr>
           <a:xfrm>
-            <a:off x="4064508" y="1280160"/>
-            <a:ext cx="310896" cy="310896"/>
+            <a:off x="658368" y="4640580"/>
+            <a:ext cx="365760" cy="365760"/>
           </a:xfrm>
           <a:prstGeom prst="rect">
             <a:avLst/>
@@ -45124,261 +45352,14 @@
       </p:pic>
       <p:sp>
         <p:nvSpPr>
-          <p:cNvPr id="13" name="Reading 1 body"/>
-          <p:cNvSpPr/>
-          <p:nvPr/>
-        </p:nvSpPr>
-        <p:spPr>
-          <a:xfrm>
-            <a:off x="457200" y="1645920"/>
-            <a:ext cx="4046220" cy="3429000"/>
-          </a:xfrm>
-          <a:prstGeom prst="rect">
-            <a:avLst/>
-          </a:prstGeom>
-          <a:solidFill>
-            <a:schemeClr val="bg2"/>
-          </a:solidFill>
-          <a:ln>
-            <a:noFill/>
-          </a:ln>
-          <a:effectLst/>
-        </p:spPr>
-        <p:style>
-          <a:lnRef idx="1">
-            <a:schemeClr val="accent1"/>
-          </a:lnRef>
-          <a:fillRef idx="3">
-            <a:schemeClr val="accent1"/>
-          </a:fillRef>
-          <a:effectRef idx="2">
-            <a:schemeClr val="accent1"/>
-          </a:effectRef>
-          <a:fontRef idx="minor">
-            <a:schemeClr val="lt1"/>
-          </a:fontRef>
-        </p:style>
-        <p:txBody>
-          <a:bodyPr rtlCol="0" anchor="ctr"/>
-          <a:lstStyle/>
-          <a:p/>
-        </p:txBody>
-      </p:sp>
-      <p:sp>
-        <p:nvSpPr>
-          <p:cNvPr id="14" name="Reading 1 text"/>
+          <p:cNvPr id="27" name="Final question text"/>
           <p:cNvSpPr txBox="1"/>
           <p:nvPr/>
         </p:nvSpPr>
         <p:spPr>
           <a:xfrm>
-            <a:off x="621792" y="1755648"/>
-            <a:ext cx="3744468" cy="3246120"/>
-          </a:xfrm>
-          <a:prstGeom prst="rect">
-            <a:avLst/>
-          </a:prstGeom>
-          <a:noFill/>
-        </p:spPr>
-        <p:txBody>
-          <a:bodyPr wrap="square" lIns="0" rIns="0" tIns="0" bIns="0" anchor="t">
-            <a:noAutofit/>
-          </a:bodyPr>
-          <a:lstStyle/>
-          <a:p>
-            <a:pPr algn="l">
-              <a:spcAft>
-                <a:spcPts val="500"/>
-              </a:spcAft>
-            </a:pPr>
-            <a:r>
-              <a:rPr sz="1100" b="1" lang="en-GB">
-                <a:solidFill>
-                  <a:schemeClr val="tx2"/>
-                </a:solidFill>
-              </a:rPr>
-              <a:t>Hanssens, D. M., Parsons, L. J. &amp; Schultz, R. L. (2001). </a:t>
-            </a:r>
-            <a:r>
-              <a:rPr sz="1100" b="0" lang="en-GB">
-                <a:solidFill>
-                  <a:schemeClr val="tx1"/>
-                </a:solidFill>
-              </a:rPr>
-              <a:t>Market Response Models. 2nd ed. Kluwer.</a:t>
-            </a:r>
-          </a:p>
-          <a:p>
-            <a:pPr algn="l">
-              <a:spcAft>
-                <a:spcPts val="500"/>
-              </a:spcAft>
-            </a:pPr>
-            <a:r>
-              <a:rPr sz="1100" b="1" lang="en-GB">
-                <a:solidFill>
-                  <a:schemeClr val="tx2"/>
-                </a:solidFill>
-              </a:rPr>
-              <a:t>Sethuraman, R., Tellis, G. J. &amp; Briesch, R. A. (2011). </a:t>
-            </a:r>
-            <a:r>
-              <a:rPr sz="1100" b="0" lang="en-GB">
-                <a:solidFill>
-                  <a:schemeClr val="tx1"/>
-                </a:solidFill>
-              </a:rPr>
-              <a:t>How well does advertising work? Journal of Marketing Research 48(3), 457–471.</a:t>
-            </a:r>
-          </a:p>
-          <a:p>
-            <a:pPr algn="l">
-              <a:spcAft>
-                <a:spcPts val="500"/>
-              </a:spcAft>
-            </a:pPr>
-            <a:r>
-              <a:rPr sz="1100" b="0" lang="en-GB">
-                <a:solidFill>
-                  <a:schemeClr val="accent1"/>
-                </a:solidFill>
-                <a:hlinkClick r:id="rId4"/>
-              </a:rPr>
-              <a:t>doi.org/10.1509/jmkr.48.3.457</a:t>
-            </a:r>
-          </a:p>
-          <a:p>
-            <a:pPr algn="l">
-              <a:spcAft>
-                <a:spcPts val="500"/>
-              </a:spcAft>
-            </a:pPr>
-            <a:r>
-              <a:rPr sz="1100" b="1" lang="en-GB">
-                <a:solidFill>
-                  <a:schemeClr val="tx2"/>
-                </a:solidFill>
-              </a:rPr>
-              <a:t>Gordon, B. R., Zettelmeyer, F., Bhargava, N. &amp; Chapsky, D. (2019). </a:t>
-            </a:r>
-            <a:r>
-              <a:rPr sz="1100" b="0" lang="en-GB">
-                <a:solidFill>
-                  <a:schemeClr val="tx1"/>
-                </a:solidFill>
-              </a:rPr>
-              <a:t>A comparison of approaches to advertising measurement. Marketing Science 38(2), 193–225.</a:t>
-            </a:r>
-          </a:p>
-          <a:p>
-            <a:pPr algn="l">
-              <a:spcAft>
-                <a:spcPts val="500"/>
-              </a:spcAft>
-            </a:pPr>
-            <a:r>
-              <a:rPr sz="1100" b="0" lang="en-GB">
-                <a:solidFill>
-                  <a:schemeClr val="accent1"/>
-                </a:solidFill>
-                <a:hlinkClick r:id="rId5"/>
-              </a:rPr>
-              <a:t>doi.org/10.1287/mksc.2018.1135</a:t>
-            </a:r>
-          </a:p>
-          <a:p>
-            <a:pPr algn="l">
-              <a:spcAft>
-                <a:spcPts val="500"/>
-              </a:spcAft>
-            </a:pPr>
-            <a:r>
-              <a:rPr sz="1100" b="1" lang="en-GB">
-                <a:solidFill>
-                  <a:schemeClr val="tx2"/>
-                </a:solidFill>
-              </a:rPr>
-              <a:t>Chan, D. &amp; Perry, M. (2017). </a:t>
-            </a:r>
-            <a:r>
-              <a:rPr sz="1100" b="0" lang="en-GB">
-                <a:solidFill>
-                  <a:schemeClr val="tx1"/>
-                </a:solidFill>
-              </a:rPr>
-              <a:t>Challenges and opportunities in media mix modeling. Google.</a:t>
-            </a:r>
-          </a:p>
-          <a:p>
-            <a:pPr algn="l">
-              <a:spcAft>
-                <a:spcPts val="500"/>
-              </a:spcAft>
-            </a:pPr>
-            <a:r>
-              <a:rPr sz="1100" b="0" lang="en-GB">
-                <a:solidFill>
-                  <a:schemeClr val="accent1"/>
-                </a:solidFill>
-                <a:hlinkClick r:id="rId6"/>
-              </a:rPr>
-              <a:t>research.google/pubs/pub45998/</a:t>
-            </a:r>
-          </a:p>
-        </p:txBody>
-      </p:sp>
-      <p:sp>
-        <p:nvSpPr>
-          <p:cNvPr id="15" name="Reading 2 header"/>
-          <p:cNvSpPr/>
-          <p:nvPr/>
-        </p:nvSpPr>
-        <p:spPr>
-          <a:xfrm>
-            <a:off x="4640580" y="1234440"/>
-            <a:ext cx="4046220" cy="411480"/>
-          </a:xfrm>
-          <a:prstGeom prst="rect">
-            <a:avLst/>
-          </a:prstGeom>
-          <a:solidFill>
-            <a:schemeClr val="accent1"/>
-          </a:solidFill>
-          <a:ln>
-            <a:noFill/>
-          </a:ln>
-          <a:effectLst/>
-        </p:spPr>
-        <p:style>
-          <a:lnRef idx="1">
-            <a:schemeClr val="accent1"/>
-          </a:lnRef>
-          <a:fillRef idx="3">
-            <a:schemeClr val="accent1"/>
-          </a:fillRef>
-          <a:effectRef idx="2">
-            <a:schemeClr val="accent1"/>
-          </a:effectRef>
-          <a:fontRef idx="minor">
-            <a:schemeClr val="lt1"/>
-          </a:fontRef>
-        </p:style>
-        <p:txBody>
-          <a:bodyPr rtlCol="0" anchor="ctr"/>
-          <a:lstStyle/>
-          <a:p/>
-        </p:txBody>
-      </p:sp>
-      <p:sp>
-        <p:nvSpPr>
-          <p:cNvPr id="16" name="Reading 2 heading"/>
-          <p:cNvSpPr txBox="1"/>
-          <p:nvPr/>
-        </p:nvSpPr>
-        <p:spPr>
-          <a:xfrm>
-            <a:off x="4777740" y="1234440"/>
-            <a:ext cx="3360420" cy="411480"/>
+            <a:off x="1207008" y="4572000"/>
+            <a:ext cx="7315200" cy="502920"/>
           </a:xfrm>
           <a:prstGeom prst="rect">
             <a:avLst/>
@@ -45397,242 +45378,20 @@
               </a:spcAft>
             </a:pPr>
             <a:r>
-              <a:rPr sz="1500" b="1" lang="en-GB">
+              <a:rPr sz="1200" b="1" lang="en-GB">
                 <a:solidFill>
                   <a:schemeClr val="bg1"/>
                 </a:solidFill>
-                <a:latin typeface="+mj-lt"/>
-              </a:rPr>
-              <a:t>Modern MMM, attribution, reading</a:t>
-            </a:r>
-          </a:p>
-        </p:txBody>
-      </p:sp>
-      <p:pic>
-        <p:nvPicPr>
-          <p:cNvPr id="17" name="Icon reading 2" descr=""/>
-          <p:cNvPicPr>
-            <a:picLocks noChangeAspect="1"/>
-          </p:cNvPicPr>
-          <p:nvPr/>
-        </p:nvPicPr>
-        <p:blipFill>
-          <a:blip r:embed="rId7"/>
-          <a:stretch>
-            <a:fillRect/>
-          </a:stretch>
-        </p:blipFill>
-        <p:spPr>
-          <a:xfrm>
-            <a:off x="8247888" y="1280160"/>
-            <a:ext cx="310896" cy="310896"/>
-          </a:xfrm>
-          <a:prstGeom prst="rect">
-            <a:avLst/>
-          </a:prstGeom>
-        </p:spPr>
-      </p:pic>
-      <p:sp>
-        <p:nvSpPr>
-          <p:cNvPr id="18" name="Reading 2 body"/>
-          <p:cNvSpPr/>
-          <p:nvPr/>
-        </p:nvSpPr>
-        <p:spPr>
-          <a:xfrm>
-            <a:off x="4640580" y="1645920"/>
-            <a:ext cx="4046220" cy="3429000"/>
-          </a:xfrm>
-          <a:prstGeom prst="rect">
-            <a:avLst/>
-          </a:prstGeom>
-          <a:solidFill>
-            <a:schemeClr val="bg2"/>
-          </a:solidFill>
-          <a:ln>
-            <a:noFill/>
-          </a:ln>
-          <a:effectLst/>
-        </p:spPr>
-        <p:style>
-          <a:lnRef idx="1">
-            <a:schemeClr val="accent1"/>
-          </a:lnRef>
-          <a:fillRef idx="3">
-            <a:schemeClr val="accent1"/>
-          </a:fillRef>
-          <a:effectRef idx="2">
-            <a:schemeClr val="accent1"/>
-          </a:effectRef>
-          <a:fontRef idx="minor">
-            <a:schemeClr val="lt1"/>
-          </a:fontRef>
-        </p:style>
-        <p:txBody>
-          <a:bodyPr rtlCol="0" anchor="ctr"/>
-          <a:lstStyle/>
-          <a:p/>
-        </p:txBody>
-      </p:sp>
-      <p:sp>
-        <p:nvSpPr>
-          <p:cNvPr id="19" name="Reading 2 text"/>
-          <p:cNvSpPr txBox="1"/>
-          <p:nvPr/>
-        </p:nvSpPr>
-        <p:spPr>
-          <a:xfrm>
-            <a:off x="4805172" y="1755648"/>
-            <a:ext cx="3744468" cy="3246120"/>
-          </a:xfrm>
-          <a:prstGeom prst="rect">
-            <a:avLst/>
-          </a:prstGeom>
-          <a:noFill/>
-        </p:spPr>
-        <p:txBody>
-          <a:bodyPr wrap="square" lIns="0" rIns="0" tIns="0" bIns="0" anchor="t">
-            <a:noAutofit/>
-          </a:bodyPr>
-          <a:lstStyle/>
-          <a:p>
-            <a:pPr algn="l">
-              <a:spcAft>
-                <a:spcPts val="500"/>
-              </a:spcAft>
-            </a:pPr>
-            <a:r>
-              <a:rPr sz="1100" b="1" lang="en-GB">
-                <a:solidFill>
-                  <a:schemeClr val="tx2"/>
-                </a:solidFill>
-              </a:rPr>
-              <a:t>Jin, Y., Wang, Y., Sun, Y., Chan, D. &amp; Koehler, J. (2017). </a:t>
-            </a:r>
-            <a:r>
-              <a:rPr sz="1100" b="0" lang="en-GB">
-                <a:solidFill>
-                  <a:schemeClr val="tx1"/>
-                </a:solidFill>
-              </a:rPr>
-              <a:t>Bayesian methods for media mix modeling with carryover and shape effects. Google.</a:t>
-            </a:r>
-          </a:p>
-          <a:p>
-            <a:pPr algn="l">
-              <a:spcAft>
-                <a:spcPts val="500"/>
-              </a:spcAft>
-            </a:pPr>
-            <a:r>
-              <a:rPr sz="1100" b="0" lang="en-GB">
-                <a:solidFill>
-                  <a:schemeClr val="accent1"/>
-                </a:solidFill>
-                <a:hlinkClick r:id="rId8"/>
-              </a:rPr>
-              <a:t>research.google/pubs/pub46001/</a:t>
-            </a:r>
-          </a:p>
-          <a:p>
-            <a:pPr algn="l">
-              <a:spcAft>
-                <a:spcPts val="500"/>
-              </a:spcAft>
-            </a:pPr>
-            <a:r>
-              <a:rPr sz="1100" b="1" lang="en-GB">
-                <a:solidFill>
-                  <a:schemeClr val="tx2"/>
-                </a:solidFill>
-              </a:rPr>
-              <a:t>Runge, J., Skokan, I., Zhou, G. &amp; Pauwels, K. (2024). </a:t>
-            </a:r>
-            <a:r>
-              <a:rPr sz="1100" b="0" lang="en-GB">
-                <a:solidFill>
-                  <a:schemeClr val="tx1"/>
-                </a:solidFill>
-              </a:rPr>
-              <a:t>Packaging up media mix modeling: Robyn's open-source approach. arXiv 2403.14674.</a:t>
-            </a:r>
-          </a:p>
-          <a:p>
-            <a:pPr algn="l">
-              <a:spcAft>
-                <a:spcPts val="500"/>
-              </a:spcAft>
-            </a:pPr>
-            <a:r>
-              <a:rPr sz="1100" b="0" lang="en-GB">
-                <a:solidFill>
-                  <a:schemeClr val="accent1"/>
-                </a:solidFill>
-                <a:hlinkClick r:id="rId9"/>
-              </a:rPr>
-              <a:t>arxiv.org/abs/2403.14674</a:t>
-            </a:r>
-          </a:p>
-          <a:p>
-            <a:pPr algn="l">
-              <a:spcAft>
-                <a:spcPts val="500"/>
-              </a:spcAft>
-            </a:pPr>
-            <a:r>
-              <a:rPr sz="1100" b="1" lang="en-GB">
-                <a:solidFill>
-                  <a:schemeClr val="tx2"/>
-                </a:solidFill>
-              </a:rPr>
-              <a:t>Fantini, F. &amp; Narayandas, D. (2023). </a:t>
-            </a:r>
-            <a:r>
-              <a:rPr sz="1100" b="0" lang="en-GB">
-                <a:solidFill>
-                  <a:schemeClr val="tx1"/>
-                </a:solidFill>
-              </a:rPr>
-              <a:t>Analytics for marketers. Harvard Business Review 101(3). Today's reading, on Canvas.</a:t>
-            </a:r>
-          </a:p>
-          <a:p>
-            <a:pPr algn="l">
-              <a:spcAft>
-                <a:spcPts val="500"/>
-              </a:spcAft>
-            </a:pPr>
-            <a:r>
-              <a:rPr sz="1100" b="1" lang="en-GB">
-                <a:solidFill>
-                  <a:schemeClr val="tx2"/>
-                </a:solidFill>
-              </a:rPr>
-              <a:t>Blake, T., Nosko, C. &amp; Tadelis, S. (2015). </a:t>
-            </a:r>
-            <a:r>
-              <a:rPr sz="1100" b="0" lang="en-GB">
-                <a:solidFill>
-                  <a:schemeClr val="tx1"/>
-                </a:solidFill>
-              </a:rPr>
-              <a:t>Consumer heterogeneity and paid search effectiveness. Econometrica 83(1), 155–174.</a:t>
-            </a:r>
-          </a:p>
-          <a:p>
-            <a:pPr algn="l">
-              <a:spcAft>
-                <a:spcPts val="500"/>
-              </a:spcAft>
-            </a:pPr>
-            <a:r>
-              <a:rPr sz="1100" b="0" lang="en-GB">
-                <a:solidFill>
-                  <a:schemeClr val="accent1"/>
-                </a:solidFill>
-                <a:hlinkClick r:id="rId10"/>
-              </a:rPr>
-              <a:t>doi.org/10.3982/ECTA12423</a:t>
+              </a:rPr>
+              <a:t>The question stays the same: </a:t>
+            </a:r>
+            <a:r>
+              <a:rPr sz="1200" b="0" lang="en-GB">
+                <a:solidFill>
+                  <a:schemeClr val="bg1"/>
+                </a:solidFill>
+              </a:rPr>
+              <a:t>where should the next euro go?</a:t>
             </a:r>
           </a:p>
         </p:txBody>
@@ -45646,6 +45405,715 @@
 </file>
 
 <file path=ppt/slides/slide44.xml><?xml version="1.0" encoding="utf-8"?>
+<p:sld xmlns:a="http://schemas.openxmlformats.org/drawingml/2006/main" xmlns:p="http://schemas.openxmlformats.org/presentationml/2006/main" xmlns:r="http://schemas.openxmlformats.org/officeDocument/2006/relationships">
+  <p:cSld>
+    <p:spTree>
+      <p:nvGrpSpPr>
+        <p:cNvPr id="1" name=""/>
+        <p:cNvGrpSpPr/>
+        <p:nvPr/>
+      </p:nvGrpSpPr>
+      <p:grpSpPr/>
+      <p:sp>
+        <p:nvSpPr>
+          <p:cNvPr id="3" name="Title 2"/>
+          <p:cNvSpPr>
+            <a:spLocks noGrp="1"/>
+          </p:cNvSpPr>
+          <p:nvPr>
+            <p:ph type="title"/>
+          </p:nvPr>
+        </p:nvSpPr>
+        <p:spPr/>
+        <p:txBody>
+          <a:bodyPr/>
+          <a:lstStyle/>
+          <a:p>
+            <a:r>
+              <a:rPr sz="1600" lang="en-GB"/>
+              <a:t>Further reading</a:t>
+            </a:r>
+          </a:p>
+        </p:txBody>
+      </p:sp>
+      <p:sp>
+        <p:nvSpPr>
+          <p:cNvPr id="8" name="Fußzeilenplatzhalter 7"/>
+          <p:cNvSpPr>
+            <a:spLocks noGrp="1"/>
+          </p:cNvSpPr>
+          <p:nvPr>
+            <p:ph type="ftr" sz="quarter" idx="11"/>
+          </p:nvPr>
+        </p:nvSpPr>
+        <p:spPr/>
+        <p:txBody>
+          <a:bodyPr/>
+          <a:lstStyle/>
+          <a:p>
+            <a:r>
+              <a:rPr lang="en-GB"/>
+              <a:t>International Marketing Analytics · WT 2026/27</a:t>
+            </a:r>
+          </a:p>
+        </p:txBody>
+      </p:sp>
+      <p:sp>
+        <p:nvSpPr>
+          <p:cNvPr id="9" name="Foliennummernplatzhalter 8"/>
+          <p:cNvSpPr>
+            <a:spLocks noGrp="1"/>
+          </p:cNvSpPr>
+          <p:nvPr>
+            <p:ph type="sldNum" sz="quarter" idx="12"/>
+          </p:nvPr>
+        </p:nvSpPr>
+        <p:spPr/>
+        <p:txBody>
+          <a:bodyPr/>
+          <a:lstStyle/>
+          <a:p>
+            <a:r>
+              <a:rPr lang="en-GB" dirty="0"/>
+              <a:t>Page </a:t>
+            </a:r>
+            <a:fld id="{BE3DC40E-DBBE-4E2D-9EEC-FBF0DA0E9179}" type="slidenum">
+              <a:rPr lang="en-GB" smtClean="0"/>
+              <a:t>‹Nr.›</a:t>
+            </a:fld>
+            <a:endParaRPr lang="en-GB" dirty="0"/>
+          </a:p>
+        </p:txBody>
+      </p:sp>
+      <p:sp>
+        <p:nvSpPr>
+          <p:cNvPr id="10" name="Reading 1 header"/>
+          <p:cNvSpPr/>
+          <p:nvPr/>
+        </p:nvSpPr>
+        <p:spPr>
+          <a:xfrm>
+            <a:off x="457200" y="1234440"/>
+            <a:ext cx="4046220" cy="411480"/>
+          </a:xfrm>
+          <a:prstGeom prst="rect">
+            <a:avLst/>
+          </a:prstGeom>
+          <a:solidFill>
+            <a:schemeClr val="accent1"/>
+          </a:solidFill>
+          <a:ln>
+            <a:noFill/>
+          </a:ln>
+          <a:effectLst/>
+        </p:spPr>
+        <p:style>
+          <a:lnRef idx="1">
+            <a:schemeClr val="accent1"/>
+          </a:lnRef>
+          <a:fillRef idx="3">
+            <a:schemeClr val="accent1"/>
+          </a:fillRef>
+          <a:effectRef idx="2">
+            <a:schemeClr val="accent1"/>
+          </a:effectRef>
+          <a:fontRef idx="minor">
+            <a:schemeClr val="lt1"/>
+          </a:fontRef>
+        </p:style>
+        <p:txBody>
+          <a:bodyPr rtlCol="0" anchor="ctr"/>
+          <a:lstStyle/>
+          <a:p/>
+        </p:txBody>
+      </p:sp>
+      <p:sp>
+        <p:nvSpPr>
+          <p:cNvPr id="11" name="Reading 1 heading"/>
+          <p:cNvSpPr txBox="1"/>
+          <p:nvPr/>
+        </p:nvSpPr>
+        <p:spPr>
+          <a:xfrm>
+            <a:off x="594360" y="1234440"/>
+            <a:ext cx="3360420" cy="411480"/>
+          </a:xfrm>
+          <a:prstGeom prst="rect">
+            <a:avLst/>
+          </a:prstGeom>
+          <a:noFill/>
+        </p:spPr>
+        <p:txBody>
+          <a:bodyPr wrap="square" lIns="0" rIns="0" tIns="0" bIns="0" anchor="ctr">
+            <a:noAutofit/>
+          </a:bodyPr>
+          <a:lstStyle/>
+          <a:p>
+            <a:pPr algn="l">
+              <a:spcAft>
+                <a:spcPts val="400"/>
+              </a:spcAft>
+            </a:pPr>
+            <a:r>
+              <a:rPr sz="1500" b="1" lang="en-GB">
+                <a:solidFill>
+                  <a:schemeClr val="bg1"/>
+                </a:solidFill>
+                <a:latin typeface="+mj-lt"/>
+              </a:rPr>
+              <a:t>Foundations and evidence</a:t>
+            </a:r>
+          </a:p>
+        </p:txBody>
+      </p:sp>
+      <p:pic>
+        <p:nvPicPr>
+          <p:cNvPr id="12" name="Icon reading 1" descr=""/>
+          <p:cNvPicPr>
+            <a:picLocks noChangeAspect="1"/>
+          </p:cNvPicPr>
+          <p:nvPr/>
+        </p:nvPicPr>
+        <p:blipFill>
+          <a:blip r:embed="rId3"/>
+          <a:stretch>
+            <a:fillRect/>
+          </a:stretch>
+        </p:blipFill>
+        <p:spPr>
+          <a:xfrm>
+            <a:off x="4064508" y="1280160"/>
+            <a:ext cx="310896" cy="310896"/>
+          </a:xfrm>
+          <a:prstGeom prst="rect">
+            <a:avLst/>
+          </a:prstGeom>
+        </p:spPr>
+      </p:pic>
+      <p:sp>
+        <p:nvSpPr>
+          <p:cNvPr id="13" name="Reading 1 body"/>
+          <p:cNvSpPr/>
+          <p:nvPr/>
+        </p:nvSpPr>
+        <p:spPr>
+          <a:xfrm>
+            <a:off x="457200" y="1645920"/>
+            <a:ext cx="4046220" cy="3429000"/>
+          </a:xfrm>
+          <a:prstGeom prst="rect">
+            <a:avLst/>
+          </a:prstGeom>
+          <a:solidFill>
+            <a:schemeClr val="bg2"/>
+          </a:solidFill>
+          <a:ln>
+            <a:noFill/>
+          </a:ln>
+          <a:effectLst/>
+        </p:spPr>
+        <p:style>
+          <a:lnRef idx="1">
+            <a:schemeClr val="accent1"/>
+          </a:lnRef>
+          <a:fillRef idx="3">
+            <a:schemeClr val="accent1"/>
+          </a:fillRef>
+          <a:effectRef idx="2">
+            <a:schemeClr val="accent1"/>
+          </a:effectRef>
+          <a:fontRef idx="minor">
+            <a:schemeClr val="lt1"/>
+          </a:fontRef>
+        </p:style>
+        <p:txBody>
+          <a:bodyPr rtlCol="0" anchor="ctr"/>
+          <a:lstStyle/>
+          <a:p/>
+        </p:txBody>
+      </p:sp>
+      <p:sp>
+        <p:nvSpPr>
+          <p:cNvPr id="14" name="Reading 1 text"/>
+          <p:cNvSpPr txBox="1"/>
+          <p:nvPr/>
+        </p:nvSpPr>
+        <p:spPr>
+          <a:xfrm>
+            <a:off x="621792" y="1755648"/>
+            <a:ext cx="3744468" cy="3246120"/>
+          </a:xfrm>
+          <a:prstGeom prst="rect">
+            <a:avLst/>
+          </a:prstGeom>
+          <a:noFill/>
+        </p:spPr>
+        <p:txBody>
+          <a:bodyPr wrap="square" lIns="0" rIns="0" tIns="0" bIns="0" anchor="t">
+            <a:noAutofit/>
+          </a:bodyPr>
+          <a:lstStyle/>
+          <a:p>
+            <a:pPr algn="l">
+              <a:spcAft>
+                <a:spcPts val="500"/>
+              </a:spcAft>
+            </a:pPr>
+            <a:r>
+              <a:rPr sz="1100" b="1" lang="en-GB">
+                <a:solidFill>
+                  <a:schemeClr val="tx2"/>
+                </a:solidFill>
+              </a:rPr>
+              <a:t>Hanssens, D. M., Parsons, L. J. &amp; Schultz, R. L. (2001). </a:t>
+            </a:r>
+            <a:r>
+              <a:rPr sz="1100" b="0" lang="en-GB">
+                <a:solidFill>
+                  <a:schemeClr val="tx1"/>
+                </a:solidFill>
+              </a:rPr>
+              <a:t>Market Response Models. 2nd ed. Kluwer.</a:t>
+            </a:r>
+          </a:p>
+          <a:p>
+            <a:pPr algn="l">
+              <a:spcAft>
+                <a:spcPts val="500"/>
+              </a:spcAft>
+            </a:pPr>
+            <a:r>
+              <a:rPr sz="1100" b="1" lang="en-GB">
+                <a:solidFill>
+                  <a:schemeClr val="tx2"/>
+                </a:solidFill>
+              </a:rPr>
+              <a:t>Sethuraman, R., Tellis, G. J. &amp; Briesch, R. A. (2011). </a:t>
+            </a:r>
+            <a:r>
+              <a:rPr sz="1100" b="0" lang="en-GB">
+                <a:solidFill>
+                  <a:schemeClr val="tx1"/>
+                </a:solidFill>
+              </a:rPr>
+              <a:t>How well does advertising work? Journal of Marketing Research 48(3), 457–471.</a:t>
+            </a:r>
+          </a:p>
+          <a:p>
+            <a:pPr algn="l">
+              <a:spcAft>
+                <a:spcPts val="500"/>
+              </a:spcAft>
+            </a:pPr>
+            <a:r>
+              <a:rPr sz="1100" b="0" lang="en-GB">
+                <a:solidFill>
+                  <a:schemeClr val="accent1"/>
+                </a:solidFill>
+                <a:hlinkClick r:id="rId4"/>
+              </a:rPr>
+              <a:t>doi.org/10.1509/jmkr.48.3.457</a:t>
+            </a:r>
+          </a:p>
+          <a:p>
+            <a:pPr algn="l">
+              <a:spcAft>
+                <a:spcPts val="500"/>
+              </a:spcAft>
+            </a:pPr>
+            <a:r>
+              <a:rPr sz="1100" b="1" lang="en-GB">
+                <a:solidFill>
+                  <a:schemeClr val="tx2"/>
+                </a:solidFill>
+              </a:rPr>
+              <a:t>Gordon, B. R., Zettelmeyer, F., Bhargava, N. &amp; Chapsky, D. (2019). </a:t>
+            </a:r>
+            <a:r>
+              <a:rPr sz="1100" b="0" lang="en-GB">
+                <a:solidFill>
+                  <a:schemeClr val="tx1"/>
+                </a:solidFill>
+              </a:rPr>
+              <a:t>A comparison of approaches to advertising measurement. Marketing Science 38(2), 193–225.</a:t>
+            </a:r>
+          </a:p>
+          <a:p>
+            <a:pPr algn="l">
+              <a:spcAft>
+                <a:spcPts val="500"/>
+              </a:spcAft>
+            </a:pPr>
+            <a:r>
+              <a:rPr sz="1100" b="0" lang="en-GB">
+                <a:solidFill>
+                  <a:schemeClr val="accent1"/>
+                </a:solidFill>
+                <a:hlinkClick r:id="rId5"/>
+              </a:rPr>
+              <a:t>doi.org/10.1287/mksc.2018.1135</a:t>
+            </a:r>
+          </a:p>
+          <a:p>
+            <a:pPr algn="l">
+              <a:spcAft>
+                <a:spcPts val="500"/>
+              </a:spcAft>
+            </a:pPr>
+            <a:r>
+              <a:rPr sz="1100" b="1" lang="en-GB">
+                <a:solidFill>
+                  <a:schemeClr val="tx2"/>
+                </a:solidFill>
+              </a:rPr>
+              <a:t>Chan, D. &amp; Perry, M. (2017). </a:t>
+            </a:r>
+            <a:r>
+              <a:rPr sz="1100" b="0" lang="en-GB">
+                <a:solidFill>
+                  <a:schemeClr val="tx1"/>
+                </a:solidFill>
+              </a:rPr>
+              <a:t>Challenges and opportunities in media mix modeling. Google.</a:t>
+            </a:r>
+          </a:p>
+          <a:p>
+            <a:pPr algn="l">
+              <a:spcAft>
+                <a:spcPts val="500"/>
+              </a:spcAft>
+            </a:pPr>
+            <a:r>
+              <a:rPr sz="1100" b="0" lang="en-GB">
+                <a:solidFill>
+                  <a:schemeClr val="accent1"/>
+                </a:solidFill>
+                <a:hlinkClick r:id="rId6"/>
+              </a:rPr>
+              <a:t>research.google/pubs/pub45998/</a:t>
+            </a:r>
+          </a:p>
+        </p:txBody>
+      </p:sp>
+      <p:sp>
+        <p:nvSpPr>
+          <p:cNvPr id="15" name="Reading 2 header"/>
+          <p:cNvSpPr/>
+          <p:nvPr/>
+        </p:nvSpPr>
+        <p:spPr>
+          <a:xfrm>
+            <a:off x="4640580" y="1234440"/>
+            <a:ext cx="4046220" cy="411480"/>
+          </a:xfrm>
+          <a:prstGeom prst="rect">
+            <a:avLst/>
+          </a:prstGeom>
+          <a:solidFill>
+            <a:schemeClr val="accent1"/>
+          </a:solidFill>
+          <a:ln>
+            <a:noFill/>
+          </a:ln>
+          <a:effectLst/>
+        </p:spPr>
+        <p:style>
+          <a:lnRef idx="1">
+            <a:schemeClr val="accent1"/>
+          </a:lnRef>
+          <a:fillRef idx="3">
+            <a:schemeClr val="accent1"/>
+          </a:fillRef>
+          <a:effectRef idx="2">
+            <a:schemeClr val="accent1"/>
+          </a:effectRef>
+          <a:fontRef idx="minor">
+            <a:schemeClr val="lt1"/>
+          </a:fontRef>
+        </p:style>
+        <p:txBody>
+          <a:bodyPr rtlCol="0" anchor="ctr"/>
+          <a:lstStyle/>
+          <a:p/>
+        </p:txBody>
+      </p:sp>
+      <p:sp>
+        <p:nvSpPr>
+          <p:cNvPr id="16" name="Reading 2 heading"/>
+          <p:cNvSpPr txBox="1"/>
+          <p:nvPr/>
+        </p:nvSpPr>
+        <p:spPr>
+          <a:xfrm>
+            <a:off x="4777740" y="1234440"/>
+            <a:ext cx="3360420" cy="411480"/>
+          </a:xfrm>
+          <a:prstGeom prst="rect">
+            <a:avLst/>
+          </a:prstGeom>
+          <a:noFill/>
+        </p:spPr>
+        <p:txBody>
+          <a:bodyPr wrap="square" lIns="0" rIns="0" tIns="0" bIns="0" anchor="ctr">
+            <a:noAutofit/>
+          </a:bodyPr>
+          <a:lstStyle/>
+          <a:p>
+            <a:pPr algn="l">
+              <a:spcAft>
+                <a:spcPts val="400"/>
+              </a:spcAft>
+            </a:pPr>
+            <a:r>
+              <a:rPr sz="1500" b="1" lang="en-GB">
+                <a:solidFill>
+                  <a:schemeClr val="bg1"/>
+                </a:solidFill>
+                <a:latin typeface="+mj-lt"/>
+              </a:rPr>
+              <a:t>Modern MMM, attribution, reading</a:t>
+            </a:r>
+          </a:p>
+        </p:txBody>
+      </p:sp>
+      <p:pic>
+        <p:nvPicPr>
+          <p:cNvPr id="17" name="Icon reading 2" descr=""/>
+          <p:cNvPicPr>
+            <a:picLocks noChangeAspect="1"/>
+          </p:cNvPicPr>
+          <p:nvPr/>
+        </p:nvPicPr>
+        <p:blipFill>
+          <a:blip r:embed="rId7"/>
+          <a:stretch>
+            <a:fillRect/>
+          </a:stretch>
+        </p:blipFill>
+        <p:spPr>
+          <a:xfrm>
+            <a:off x="8247888" y="1280160"/>
+            <a:ext cx="310896" cy="310896"/>
+          </a:xfrm>
+          <a:prstGeom prst="rect">
+            <a:avLst/>
+          </a:prstGeom>
+        </p:spPr>
+      </p:pic>
+      <p:sp>
+        <p:nvSpPr>
+          <p:cNvPr id="18" name="Reading 2 body"/>
+          <p:cNvSpPr/>
+          <p:nvPr/>
+        </p:nvSpPr>
+        <p:spPr>
+          <a:xfrm>
+            <a:off x="4640580" y="1645920"/>
+            <a:ext cx="4046220" cy="3429000"/>
+          </a:xfrm>
+          <a:prstGeom prst="rect">
+            <a:avLst/>
+          </a:prstGeom>
+          <a:solidFill>
+            <a:schemeClr val="bg2"/>
+          </a:solidFill>
+          <a:ln>
+            <a:noFill/>
+          </a:ln>
+          <a:effectLst/>
+        </p:spPr>
+        <p:style>
+          <a:lnRef idx="1">
+            <a:schemeClr val="accent1"/>
+          </a:lnRef>
+          <a:fillRef idx="3">
+            <a:schemeClr val="accent1"/>
+          </a:fillRef>
+          <a:effectRef idx="2">
+            <a:schemeClr val="accent1"/>
+          </a:effectRef>
+          <a:fontRef idx="minor">
+            <a:schemeClr val="lt1"/>
+          </a:fontRef>
+        </p:style>
+        <p:txBody>
+          <a:bodyPr rtlCol="0" anchor="ctr"/>
+          <a:lstStyle/>
+          <a:p/>
+        </p:txBody>
+      </p:sp>
+      <p:sp>
+        <p:nvSpPr>
+          <p:cNvPr id="19" name="Reading 2 text"/>
+          <p:cNvSpPr txBox="1"/>
+          <p:nvPr/>
+        </p:nvSpPr>
+        <p:spPr>
+          <a:xfrm>
+            <a:off x="4805172" y="1755648"/>
+            <a:ext cx="3744468" cy="3246120"/>
+          </a:xfrm>
+          <a:prstGeom prst="rect">
+            <a:avLst/>
+          </a:prstGeom>
+          <a:noFill/>
+        </p:spPr>
+        <p:txBody>
+          <a:bodyPr wrap="square" lIns="0" rIns="0" tIns="0" bIns="0" anchor="t">
+            <a:noAutofit/>
+          </a:bodyPr>
+          <a:lstStyle/>
+          <a:p>
+            <a:pPr algn="l">
+              <a:spcAft>
+                <a:spcPts val="500"/>
+              </a:spcAft>
+            </a:pPr>
+            <a:r>
+              <a:rPr sz="1100" b="1" lang="en-GB">
+                <a:solidFill>
+                  <a:schemeClr val="tx2"/>
+                </a:solidFill>
+              </a:rPr>
+              <a:t>Jin, Y., Wang, Y., Sun, Y., Chan, D. &amp; Koehler, J. (2017). </a:t>
+            </a:r>
+            <a:r>
+              <a:rPr sz="1100" b="0" lang="en-GB">
+                <a:solidFill>
+                  <a:schemeClr val="tx1"/>
+                </a:solidFill>
+              </a:rPr>
+              <a:t>Bayesian methods for media mix modeling with carryover and shape effects. Google.</a:t>
+            </a:r>
+          </a:p>
+          <a:p>
+            <a:pPr algn="l">
+              <a:spcAft>
+                <a:spcPts val="500"/>
+              </a:spcAft>
+            </a:pPr>
+            <a:r>
+              <a:rPr sz="1100" b="0" lang="en-GB">
+                <a:solidFill>
+                  <a:schemeClr val="accent1"/>
+                </a:solidFill>
+                <a:hlinkClick r:id="rId8"/>
+              </a:rPr>
+              <a:t>research.google/pubs/pub46001/</a:t>
+            </a:r>
+          </a:p>
+          <a:p>
+            <a:pPr algn="l">
+              <a:spcAft>
+                <a:spcPts val="500"/>
+              </a:spcAft>
+            </a:pPr>
+            <a:r>
+              <a:rPr sz="1100" b="1" lang="en-GB">
+                <a:solidFill>
+                  <a:schemeClr val="tx2"/>
+                </a:solidFill>
+              </a:rPr>
+              <a:t>Runge, J., Skokan, I., Zhou, G. &amp; Pauwels, K. (2024). </a:t>
+            </a:r>
+            <a:r>
+              <a:rPr sz="1100" b="0" lang="en-GB">
+                <a:solidFill>
+                  <a:schemeClr val="tx1"/>
+                </a:solidFill>
+              </a:rPr>
+              <a:t>Packaging up media mix modeling: Robyn's open-source approach. arXiv 2403.14674.</a:t>
+            </a:r>
+          </a:p>
+          <a:p>
+            <a:pPr algn="l">
+              <a:spcAft>
+                <a:spcPts val="500"/>
+              </a:spcAft>
+            </a:pPr>
+            <a:r>
+              <a:rPr sz="1100" b="0" lang="en-GB">
+                <a:solidFill>
+                  <a:schemeClr val="accent1"/>
+                </a:solidFill>
+                <a:hlinkClick r:id="rId9"/>
+              </a:rPr>
+              <a:t>arxiv.org/abs/2403.14674</a:t>
+            </a:r>
+          </a:p>
+          <a:p>
+            <a:pPr algn="l">
+              <a:spcAft>
+                <a:spcPts val="500"/>
+              </a:spcAft>
+            </a:pPr>
+            <a:r>
+              <a:rPr sz="1100" b="1" lang="en-GB">
+                <a:solidFill>
+                  <a:schemeClr val="tx2"/>
+                </a:solidFill>
+              </a:rPr>
+              <a:t>Fantini, F. &amp; Narayandas, D. (2023). </a:t>
+            </a:r>
+            <a:r>
+              <a:rPr sz="1100" b="0" lang="en-GB">
+                <a:solidFill>
+                  <a:schemeClr val="tx1"/>
+                </a:solidFill>
+              </a:rPr>
+              <a:t>Analytics for marketers. Harvard Business Review 101(3). Today's reading, on Canvas.</a:t>
+            </a:r>
+          </a:p>
+          <a:p>
+            <a:pPr algn="l">
+              <a:spcAft>
+                <a:spcPts val="500"/>
+              </a:spcAft>
+            </a:pPr>
+            <a:r>
+              <a:rPr sz="1100" b="1" lang="en-GB">
+                <a:solidFill>
+                  <a:schemeClr val="tx2"/>
+                </a:solidFill>
+              </a:rPr>
+              <a:t>Blake, T., Nosko, C. &amp; Tadelis, S. (2015). </a:t>
+            </a:r>
+            <a:r>
+              <a:rPr sz="1100" b="0" lang="en-GB">
+                <a:solidFill>
+                  <a:schemeClr val="tx1"/>
+                </a:solidFill>
+              </a:rPr>
+              <a:t>Consumer heterogeneity and paid search effectiveness. Econometrica 83(1), 155–174.</a:t>
+            </a:r>
+          </a:p>
+          <a:p>
+            <a:pPr algn="l">
+              <a:spcAft>
+                <a:spcPts val="500"/>
+              </a:spcAft>
+            </a:pPr>
+            <a:r>
+              <a:rPr sz="1100" b="0" lang="en-GB">
+                <a:solidFill>
+                  <a:schemeClr val="accent1"/>
+                </a:solidFill>
+                <a:hlinkClick r:id="rId10"/>
+              </a:rPr>
+              <a:t>doi.org/10.3982/ECTA12423</a:t>
+            </a:r>
+          </a:p>
+        </p:txBody>
+      </p:sp>
+    </p:spTree>
+  </p:cSld>
+  <p:clrMapOvr>
+    <a:masterClrMapping/>
+  </p:clrMapOvr>
+</p:sld>
+</file>
+
+<file path=ppt/slides/slide45.xml><?xml version="1.0" encoding="utf-8"?>
 <p:sld xmlns:a="http://schemas.openxmlformats.org/drawingml/2006/main" xmlns:p="http://schemas.openxmlformats.org/presentationml/2006/main" xmlns:r="http://schemas.openxmlformats.org/officeDocument/2006/relationships">
   <p:cSld>
     <p:spTree>
